--- a/Case_Study_Template_Standard.pptx
+++ b/Case_Study_Template_Standard.pptx
@@ -1,23 +1,23 @@
 
 <file path=ppt/presentation.xml><?xml version="1.0" encoding="utf-8"?>
-<p:presentation xmlns:a="http://schemas.openxmlformats.org/drawingml/2006/main" xmlns:r="http://schemas.openxmlformats.org/officeDocument/2006/relationships" xmlns:p="http://schemas.openxmlformats.org/presentationml/2006/main" saveSubsetFonts="1" embedTrueTypeFonts="true">
+<p:presentation xmlns:a="http://schemas.openxmlformats.org/drawingml/2006/main" xmlns:r="http://schemas.openxmlformats.org/officeDocument/2006/relationships" xmlns:p="http://schemas.openxmlformats.org/presentationml/2006/main" embedTrueTypeFonts="1" saveSubsetFonts="1">
   <p:sldMasterIdLst>
     <p:sldMasterId id="2147483648" r:id="rId1"/>
   </p:sldMasterIdLst>
   <p:sldIdLst>
-    <p:sldId id="256" r:id="rId6"/>
-    <p:sldId id="257" r:id="rId7"/>
+    <p:sldId id="256" r:id="rId2"/>
+    <p:sldId id="257" r:id="rId3"/>
   </p:sldIdLst>
   <p:sldSz cx="7556500" cy="10795000"/>
-  <p:notesSz cx="6858000" cy="9144000"/>
+  <p:notesSz cx="6797675" cy="9926638"/>
   <p:embeddedFontLst>
     <p:embeddedFont>
-      <p:font typeface="Aller 1" charset="1" panose="02000803040000020004"/>
-      <p:regular r:id="rId8"/>
+      <p:font typeface="Aller 1" panose="020B0604020202020204" charset="0"/>
+      <p:regular r:id="rId4"/>
     </p:embeddedFont>
     <p:embeddedFont>
-      <p:font typeface="Aller 2" charset="1" panose="02000503030000020004"/>
-      <p:regular r:id="rId9"/>
+      <p:font typeface="Aller 2" panose="020B0604020202020204" charset="0"/>
+      <p:regular r:id="rId5"/>
     </p:embeddedFont>
   </p:embeddedFontLst>
   <p:defaultTextStyle>
@@ -115,7 +115,139 @@
       </a:defRPr>
     </a:lvl9pPr>
   </p:defaultTextStyle>
+  <p:extLst>
+    <p:ext uri="{EFAFB233-063F-42B5-8137-9DF3F51BA10A}">
+      <p15:sldGuideLst xmlns:p15="http://schemas.microsoft.com/office/powerpoint/2012/main">
+        <p15:guide id="1" orient="horz" pos="2160">
+          <p15:clr>
+            <a:srgbClr val="A4A3A4"/>
+          </p15:clr>
+        </p15:guide>
+        <p15:guide id="2" pos="2880">
+          <p15:clr>
+            <a:srgbClr val="A4A3A4"/>
+          </p15:clr>
+        </p15:guide>
+      </p15:sldGuideLst>
+    </p:ext>
+  </p:extLst>
 </p:presentation>
+</file>
+
+<file path=ppt/revisionInfo.xml><?xml version="1.0" encoding="utf-8"?>
+<p1510:revInfo xmlns:a="http://schemas.openxmlformats.org/drawingml/2006/main" xmlns:r="http://schemas.openxmlformats.org/officeDocument/2006/relationships" xmlns:p1510="http://schemas.microsoft.com/office/powerpoint/2015/10/main">
+  <p1510:revLst>
+    <p1510:client id="{5DDCBCC5-735D-4552-80F2-32644A7B4025}" v="1" dt="2026-06-11T14:15:27.830"/>
+  </p1510:revLst>
+</p1510:revInfo>
+</file>
+
+<file path=ppt/changesInfos/changesInfo1.xml><?xml version="1.0" encoding="utf-8"?>
+<pc:chgInfo xmlns:a="http://schemas.openxmlformats.org/drawingml/2006/main" xmlns:r="http://schemas.openxmlformats.org/officeDocument/2006/relationships" xmlns:ac="http://schemas.microsoft.com/office/drawing/2013/main/command" xmlns:pc="http://schemas.microsoft.com/office/powerpoint/2013/main/command">
+  <pc:docChgLst>
+    <pc:chgData name="Danny Cater" userId="ba87f93b-7973-45e9-b6f8-e5b4cfef1913" providerId="ADAL" clId="{AC0A7BE5-ACF8-4B8A-8006-46554F178A3B}"/>
+    <pc:docChg chg="modSld">
+      <pc:chgData name="Danny Cater" userId="ba87f93b-7973-45e9-b6f8-e5b4cfef1913" providerId="ADAL" clId="{AC0A7BE5-ACF8-4B8A-8006-46554F178A3B}" dt="2026-06-11T14:33:22.483" v="876" actId="20577"/>
+      <pc:docMkLst>
+        <pc:docMk/>
+      </pc:docMkLst>
+      <pc:sldChg chg="modSp mod">
+        <pc:chgData name="Danny Cater" userId="ba87f93b-7973-45e9-b6f8-e5b4cfef1913" providerId="ADAL" clId="{AC0A7BE5-ACF8-4B8A-8006-46554F178A3B}" dt="2026-06-11T14:30:16.479" v="364" actId="20577"/>
+        <pc:sldMkLst>
+          <pc:docMk/>
+          <pc:sldMk cId="0" sldId="256"/>
+        </pc:sldMkLst>
+        <pc:spChg chg="mod">
+          <ac:chgData name="Danny Cater" userId="ba87f93b-7973-45e9-b6f8-e5b4cfef1913" providerId="ADAL" clId="{AC0A7BE5-ACF8-4B8A-8006-46554F178A3B}" dt="2026-06-11T14:28:15.997" v="33" actId="20577"/>
+          <ac:spMkLst>
+            <pc:docMk/>
+            <pc:sldMk cId="0" sldId="256"/>
+            <ac:spMk id="39" creationId="{00000000-0000-0000-0000-000000000000}"/>
+          </ac:spMkLst>
+        </pc:spChg>
+        <pc:spChg chg="mod">
+          <ac:chgData name="Danny Cater" userId="ba87f93b-7973-45e9-b6f8-e5b4cfef1913" providerId="ADAL" clId="{AC0A7BE5-ACF8-4B8A-8006-46554F178A3B}" dt="2026-06-11T14:28:33.394" v="78" actId="20577"/>
+          <ac:spMkLst>
+            <pc:docMk/>
+            <pc:sldMk cId="0" sldId="256"/>
+            <ac:spMk id="42" creationId="{00000000-0000-0000-0000-000000000000}"/>
+          </ac:spMkLst>
+        </pc:spChg>
+        <pc:spChg chg="mod">
+          <ac:chgData name="Danny Cater" userId="ba87f93b-7973-45e9-b6f8-e5b4cfef1913" providerId="ADAL" clId="{AC0A7BE5-ACF8-4B8A-8006-46554F178A3B}" dt="2026-06-11T14:30:16.479" v="364" actId="20577"/>
+          <ac:spMkLst>
+            <pc:docMk/>
+            <pc:sldMk cId="0" sldId="256"/>
+            <ac:spMk id="43" creationId="{00000000-0000-0000-0000-000000000000}"/>
+          </ac:spMkLst>
+        </pc:spChg>
+      </pc:sldChg>
+      <pc:sldChg chg="modSp mod">
+        <pc:chgData name="Danny Cater" userId="ba87f93b-7973-45e9-b6f8-e5b4cfef1913" providerId="ADAL" clId="{AC0A7BE5-ACF8-4B8A-8006-46554F178A3B}" dt="2026-06-11T14:33:22.483" v="876" actId="20577"/>
+        <pc:sldMkLst>
+          <pc:docMk/>
+          <pc:sldMk cId="0" sldId="257"/>
+        </pc:sldMkLst>
+        <pc:spChg chg="mod">
+          <ac:chgData name="Danny Cater" userId="ba87f93b-7973-45e9-b6f8-e5b4cfef1913" providerId="ADAL" clId="{AC0A7BE5-ACF8-4B8A-8006-46554F178A3B}" dt="2026-06-11T14:31:22.110" v="505" actId="20577"/>
+          <ac:spMkLst>
+            <pc:docMk/>
+            <pc:sldMk cId="0" sldId="257"/>
+            <ac:spMk id="28" creationId="{00000000-0000-0000-0000-000000000000}"/>
+          </ac:spMkLst>
+        </pc:spChg>
+        <pc:spChg chg="mod">
+          <ac:chgData name="Danny Cater" userId="ba87f93b-7973-45e9-b6f8-e5b4cfef1913" providerId="ADAL" clId="{AC0A7BE5-ACF8-4B8A-8006-46554F178A3B}" dt="2026-06-11T14:30:37.479" v="408" actId="20577"/>
+          <ac:spMkLst>
+            <pc:docMk/>
+            <pc:sldMk cId="0" sldId="257"/>
+            <ac:spMk id="30" creationId="{00000000-0000-0000-0000-000000000000}"/>
+          </ac:spMkLst>
+        </pc:spChg>
+        <pc:spChg chg="mod">
+          <ac:chgData name="Danny Cater" userId="ba87f93b-7973-45e9-b6f8-e5b4cfef1913" providerId="ADAL" clId="{AC0A7BE5-ACF8-4B8A-8006-46554F178A3B}" dt="2026-06-11T14:30:53.924" v="452" actId="20577"/>
+          <ac:spMkLst>
+            <pc:docMk/>
+            <pc:sldMk cId="0" sldId="257"/>
+            <ac:spMk id="31" creationId="{00000000-0000-0000-0000-000000000000}"/>
+          </ac:spMkLst>
+        </pc:spChg>
+        <pc:spChg chg="mod">
+          <ac:chgData name="Danny Cater" userId="ba87f93b-7973-45e9-b6f8-e5b4cfef1913" providerId="ADAL" clId="{AC0A7BE5-ACF8-4B8A-8006-46554F178A3B}" dt="2026-06-11T14:31:36.030" v="547" actId="20577"/>
+          <ac:spMkLst>
+            <pc:docMk/>
+            <pc:sldMk cId="0" sldId="257"/>
+            <ac:spMk id="37" creationId="{00000000-0000-0000-0000-000000000000}"/>
+          </ac:spMkLst>
+        </pc:spChg>
+        <pc:spChg chg="mod">
+          <ac:chgData name="Danny Cater" userId="ba87f93b-7973-45e9-b6f8-e5b4cfef1913" providerId="ADAL" clId="{AC0A7BE5-ACF8-4B8A-8006-46554F178A3B}" dt="2026-06-11T14:31:50.044" v="586" actId="20577"/>
+          <ac:spMkLst>
+            <pc:docMk/>
+            <pc:sldMk cId="0" sldId="257"/>
+            <ac:spMk id="43" creationId="{00000000-0000-0000-0000-000000000000}"/>
+          </ac:spMkLst>
+        </pc:spChg>
+        <pc:spChg chg="mod">
+          <ac:chgData name="Danny Cater" userId="ba87f93b-7973-45e9-b6f8-e5b4cfef1913" providerId="ADAL" clId="{AC0A7BE5-ACF8-4B8A-8006-46554F178A3B}" dt="2026-06-11T14:32:03.460" v="627" actId="20577"/>
+          <ac:spMkLst>
+            <pc:docMk/>
+            <pc:sldMk cId="0" sldId="257"/>
+            <ac:spMk id="49" creationId="{00000000-0000-0000-0000-000000000000}"/>
+          </ac:spMkLst>
+        </pc:spChg>
+        <pc:spChg chg="mod">
+          <ac:chgData name="Danny Cater" userId="ba87f93b-7973-45e9-b6f8-e5b4cfef1913" providerId="ADAL" clId="{AC0A7BE5-ACF8-4B8A-8006-46554F178A3B}" dt="2026-06-11T14:33:22.483" v="876" actId="20577"/>
+          <ac:spMkLst>
+            <pc:docMk/>
+            <pc:sldMk cId="0" sldId="257"/>
+            <ac:spMk id="56" creationId="{00000000-0000-0000-0000-000000000000}"/>
+          </ac:spMkLst>
+        </pc:spChg>
+      </pc:sldChg>
+    </pc:docChg>
+  </pc:docChgLst>
+</pc:chgInfo>
 </file>
 
 <file path=ppt/slideLayouts/slideLayout1.xml><?xml version="1.0" encoding="utf-8"?>
@@ -156,10 +288,9 @@
           <a:lstStyle/>
           <a:p>
             <a:r>
-              <a:rPr lang="en-US" smtClean="0"/>
+              <a:rPr lang="en-US"/>
               <a:t>Click to edit Master title style</a:t>
             </a:r>
-            <a:endParaRPr lang="en-US"/>
           </a:p>
         </p:txBody>
       </p:sp>
@@ -275,10 +406,9 @@
           </a:lstStyle>
           <a:p>
             <a:r>
-              <a:rPr lang="en-US" smtClean="0"/>
+              <a:rPr lang="en-US"/>
               <a:t>Click to edit Master subtitle style</a:t>
             </a:r>
-            <a:endParaRPr lang="en-US"/>
           </a:p>
         </p:txBody>
       </p:sp>
@@ -300,7 +430,7 @@
             <a:fld id="{1D8BD707-D9CF-40AE-B4C6-C98DA3205C09}" type="datetimeFigureOut">
               <a:rPr lang="en-US" smtClean="0"/>
               <a:pPr/>
-              <a:t>8/1/2011</a:t>
+              <a:t>6/11/2026</a:t>
             </a:fld>
             <a:endParaRPr lang="en-US"/>
           </a:p>
@@ -390,10 +520,9 @@
           <a:lstStyle/>
           <a:p>
             <a:r>
-              <a:rPr lang="en-US" smtClean="0"/>
+              <a:rPr lang="en-US"/>
               <a:t>Click to edit Master title style</a:t>
             </a:r>
-            <a:endParaRPr lang="en-US"/>
           </a:p>
         </p:txBody>
       </p:sp>
@@ -414,38 +543,37 @@
           <a:p>
             <a:pPr lvl="0"/>
             <a:r>
-              <a:rPr lang="en-US" smtClean="0"/>
+              <a:rPr lang="en-US"/>
               <a:t>Click to edit Master text styles</a:t>
             </a:r>
           </a:p>
           <a:p>
             <a:pPr lvl="1"/>
             <a:r>
-              <a:rPr lang="en-US" smtClean="0"/>
+              <a:rPr lang="en-US"/>
               <a:t>Second level</a:t>
             </a:r>
           </a:p>
           <a:p>
             <a:pPr lvl="2"/>
             <a:r>
-              <a:rPr lang="en-US" smtClean="0"/>
+              <a:rPr lang="en-US"/>
               <a:t>Third level</a:t>
             </a:r>
           </a:p>
           <a:p>
             <a:pPr lvl="3"/>
             <a:r>
-              <a:rPr lang="en-US" smtClean="0"/>
+              <a:rPr lang="en-US"/>
               <a:t>Fourth level</a:t>
             </a:r>
           </a:p>
           <a:p>
             <a:pPr lvl="4"/>
             <a:r>
-              <a:rPr lang="en-US" smtClean="0"/>
+              <a:rPr lang="en-US"/>
               <a:t>Fifth level</a:t>
             </a:r>
-            <a:endParaRPr lang="en-US"/>
           </a:p>
         </p:txBody>
       </p:sp>
@@ -467,7 +595,7 @@
             <a:fld id="{1D8BD707-D9CF-40AE-B4C6-C98DA3205C09}" type="datetimeFigureOut">
               <a:rPr lang="en-US" smtClean="0"/>
               <a:pPr/>
-              <a:t>8/1/2011</a:t>
+              <a:t>6/11/2026</a:t>
             </a:fld>
             <a:endParaRPr lang="en-US"/>
           </a:p>
@@ -562,10 +690,9 @@
           <a:lstStyle/>
           <a:p>
             <a:r>
-              <a:rPr lang="en-US" smtClean="0"/>
+              <a:rPr lang="en-US"/>
               <a:t>Click to edit Master title style</a:t>
             </a:r>
-            <a:endParaRPr lang="en-US"/>
           </a:p>
         </p:txBody>
       </p:sp>
@@ -591,38 +718,37 @@
           <a:p>
             <a:pPr lvl="0"/>
             <a:r>
-              <a:rPr lang="en-US" smtClean="0"/>
+              <a:rPr lang="en-US"/>
               <a:t>Click to edit Master text styles</a:t>
             </a:r>
           </a:p>
           <a:p>
             <a:pPr lvl="1"/>
             <a:r>
-              <a:rPr lang="en-US" smtClean="0"/>
+              <a:rPr lang="en-US"/>
               <a:t>Second level</a:t>
             </a:r>
           </a:p>
           <a:p>
             <a:pPr lvl="2"/>
             <a:r>
-              <a:rPr lang="en-US" smtClean="0"/>
+              <a:rPr lang="en-US"/>
               <a:t>Third level</a:t>
             </a:r>
           </a:p>
           <a:p>
             <a:pPr lvl="3"/>
             <a:r>
-              <a:rPr lang="en-US" smtClean="0"/>
+              <a:rPr lang="en-US"/>
               <a:t>Fourth level</a:t>
             </a:r>
           </a:p>
           <a:p>
             <a:pPr lvl="4"/>
             <a:r>
-              <a:rPr lang="en-US" smtClean="0"/>
+              <a:rPr lang="en-US"/>
               <a:t>Fifth level</a:t>
             </a:r>
-            <a:endParaRPr lang="en-US"/>
           </a:p>
         </p:txBody>
       </p:sp>
@@ -644,7 +770,7 @@
             <a:fld id="{1D8BD707-D9CF-40AE-B4C6-C98DA3205C09}" type="datetimeFigureOut">
               <a:rPr lang="en-US" smtClean="0"/>
               <a:pPr/>
-              <a:t>8/1/2011</a:t>
+              <a:t>6/11/2026</a:t>
             </a:fld>
             <a:endParaRPr lang="en-US"/>
           </a:p>
@@ -734,10 +860,9 @@
           <a:lstStyle/>
           <a:p>
             <a:r>
-              <a:rPr lang="en-US" smtClean="0"/>
+              <a:rPr lang="en-US"/>
               <a:t>Click to edit Master title style</a:t>
             </a:r>
-            <a:endParaRPr lang="en-US"/>
           </a:p>
         </p:txBody>
       </p:sp>
@@ -758,38 +883,37 @@
           <a:p>
             <a:pPr lvl="0"/>
             <a:r>
-              <a:rPr lang="en-US" smtClean="0"/>
+              <a:rPr lang="en-US"/>
               <a:t>Click to edit Master text styles</a:t>
             </a:r>
           </a:p>
           <a:p>
             <a:pPr lvl="1"/>
             <a:r>
-              <a:rPr lang="en-US" smtClean="0"/>
+              <a:rPr lang="en-US"/>
               <a:t>Second level</a:t>
             </a:r>
           </a:p>
           <a:p>
             <a:pPr lvl="2"/>
             <a:r>
-              <a:rPr lang="en-US" smtClean="0"/>
+              <a:rPr lang="en-US"/>
               <a:t>Third level</a:t>
             </a:r>
           </a:p>
           <a:p>
             <a:pPr lvl="3"/>
             <a:r>
-              <a:rPr lang="en-US" smtClean="0"/>
+              <a:rPr lang="en-US"/>
               <a:t>Fourth level</a:t>
             </a:r>
           </a:p>
           <a:p>
             <a:pPr lvl="4"/>
             <a:r>
-              <a:rPr lang="en-US" smtClean="0"/>
+              <a:rPr lang="en-US"/>
               <a:t>Fifth level</a:t>
             </a:r>
-            <a:endParaRPr lang="en-US"/>
           </a:p>
         </p:txBody>
       </p:sp>
@@ -811,7 +935,7 @@
             <a:fld id="{1D8BD707-D9CF-40AE-B4C6-C98DA3205C09}" type="datetimeFigureOut">
               <a:rPr lang="en-US" smtClean="0"/>
               <a:pPr/>
-              <a:t>8/1/2011</a:t>
+              <a:t>6/11/2026</a:t>
             </a:fld>
             <a:endParaRPr lang="en-US"/>
           </a:p>
@@ -910,10 +1034,9 @@
           </a:lstStyle>
           <a:p>
             <a:r>
-              <a:rPr lang="en-US" smtClean="0"/>
+              <a:rPr lang="en-US"/>
               <a:t>Click to edit Master title style</a:t>
             </a:r>
-            <a:endParaRPr lang="en-US"/>
           </a:p>
         </p:txBody>
       </p:sp>
@@ -1030,7 +1153,7 @@
           <a:p>
             <a:pPr lvl="0"/>
             <a:r>
-              <a:rPr lang="en-US" smtClean="0"/>
+              <a:rPr lang="en-US"/>
               <a:t>Click to edit Master text styles</a:t>
             </a:r>
           </a:p>
@@ -1054,7 +1177,7 @@
             <a:fld id="{1D8BD707-D9CF-40AE-B4C6-C98DA3205C09}" type="datetimeFigureOut">
               <a:rPr lang="en-US" smtClean="0"/>
               <a:pPr/>
-              <a:t>8/1/2011</a:t>
+              <a:t>6/11/2026</a:t>
             </a:fld>
             <a:endParaRPr lang="en-US"/>
           </a:p>
@@ -1144,10 +1267,9 @@
           <a:lstStyle/>
           <a:p>
             <a:r>
-              <a:rPr lang="en-US" smtClean="0"/>
+              <a:rPr lang="en-US"/>
               <a:t>Click to edit Master title style</a:t>
             </a:r>
-            <a:endParaRPr lang="en-US"/>
           </a:p>
         </p:txBody>
       </p:sp>
@@ -1201,38 +1323,37 @@
           <a:p>
             <a:pPr lvl="0"/>
             <a:r>
-              <a:rPr lang="en-US" smtClean="0"/>
+              <a:rPr lang="en-US"/>
               <a:t>Click to edit Master text styles</a:t>
             </a:r>
           </a:p>
           <a:p>
             <a:pPr lvl="1"/>
             <a:r>
-              <a:rPr lang="en-US" smtClean="0"/>
+              <a:rPr lang="en-US"/>
               <a:t>Second level</a:t>
             </a:r>
           </a:p>
           <a:p>
             <a:pPr lvl="2"/>
             <a:r>
-              <a:rPr lang="en-US" smtClean="0"/>
+              <a:rPr lang="en-US"/>
               <a:t>Third level</a:t>
             </a:r>
           </a:p>
           <a:p>
             <a:pPr lvl="3"/>
             <a:r>
-              <a:rPr lang="en-US" smtClean="0"/>
+              <a:rPr lang="en-US"/>
               <a:t>Fourth level</a:t>
             </a:r>
           </a:p>
           <a:p>
             <a:pPr lvl="4"/>
             <a:r>
-              <a:rPr lang="en-US" smtClean="0"/>
+              <a:rPr lang="en-US"/>
               <a:t>Fifth level</a:t>
             </a:r>
-            <a:endParaRPr lang="en-US"/>
           </a:p>
         </p:txBody>
       </p:sp>
@@ -1286,38 +1407,37 @@
           <a:p>
             <a:pPr lvl="0"/>
             <a:r>
-              <a:rPr lang="en-US" smtClean="0"/>
+              <a:rPr lang="en-US"/>
               <a:t>Click to edit Master text styles</a:t>
             </a:r>
           </a:p>
           <a:p>
             <a:pPr lvl="1"/>
             <a:r>
-              <a:rPr lang="en-US" smtClean="0"/>
+              <a:rPr lang="en-US"/>
               <a:t>Second level</a:t>
             </a:r>
           </a:p>
           <a:p>
             <a:pPr lvl="2"/>
             <a:r>
-              <a:rPr lang="en-US" smtClean="0"/>
+              <a:rPr lang="en-US"/>
               <a:t>Third level</a:t>
             </a:r>
           </a:p>
           <a:p>
             <a:pPr lvl="3"/>
             <a:r>
-              <a:rPr lang="en-US" smtClean="0"/>
+              <a:rPr lang="en-US"/>
               <a:t>Fourth level</a:t>
             </a:r>
           </a:p>
           <a:p>
             <a:pPr lvl="4"/>
             <a:r>
-              <a:rPr lang="en-US" smtClean="0"/>
+              <a:rPr lang="en-US"/>
               <a:t>Fifth level</a:t>
             </a:r>
-            <a:endParaRPr lang="en-US"/>
           </a:p>
         </p:txBody>
       </p:sp>
@@ -1339,7 +1459,7 @@
             <a:fld id="{1D8BD707-D9CF-40AE-B4C6-C98DA3205C09}" type="datetimeFigureOut">
               <a:rPr lang="en-US" smtClean="0"/>
               <a:pPr/>
-              <a:t>8/1/2011</a:t>
+              <a:t>6/11/2026</a:t>
             </a:fld>
             <a:endParaRPr lang="en-US"/>
           </a:p>
@@ -1433,10 +1553,9 @@
           </a:lstStyle>
           <a:p>
             <a:r>
-              <a:rPr lang="en-US" smtClean="0"/>
+              <a:rPr lang="en-US"/>
               <a:t>Click to edit Master title style</a:t>
             </a:r>
-            <a:endParaRPr lang="en-US"/>
           </a:p>
         </p:txBody>
       </p:sp>
@@ -1499,7 +1618,7 @@
           <a:p>
             <a:pPr lvl="0"/>
             <a:r>
-              <a:rPr lang="en-US" smtClean="0"/>
+              <a:rPr lang="en-US"/>
               <a:t>Click to edit Master text styles</a:t>
             </a:r>
           </a:p>
@@ -1555,38 +1674,37 @@
           <a:p>
             <a:pPr lvl="0"/>
             <a:r>
-              <a:rPr lang="en-US" smtClean="0"/>
+              <a:rPr lang="en-US"/>
               <a:t>Click to edit Master text styles</a:t>
             </a:r>
           </a:p>
           <a:p>
             <a:pPr lvl="1"/>
             <a:r>
-              <a:rPr lang="en-US" smtClean="0"/>
+              <a:rPr lang="en-US"/>
               <a:t>Second level</a:t>
             </a:r>
           </a:p>
           <a:p>
             <a:pPr lvl="2"/>
             <a:r>
-              <a:rPr lang="en-US" smtClean="0"/>
+              <a:rPr lang="en-US"/>
               <a:t>Third level</a:t>
             </a:r>
           </a:p>
           <a:p>
             <a:pPr lvl="3"/>
             <a:r>
-              <a:rPr lang="en-US" smtClean="0"/>
+              <a:rPr lang="en-US"/>
               <a:t>Fourth level</a:t>
             </a:r>
           </a:p>
           <a:p>
             <a:pPr lvl="4"/>
             <a:r>
-              <a:rPr lang="en-US" smtClean="0"/>
+              <a:rPr lang="en-US"/>
               <a:t>Fifth level</a:t>
             </a:r>
-            <a:endParaRPr lang="en-US"/>
           </a:p>
         </p:txBody>
       </p:sp>
@@ -1649,7 +1767,7 @@
           <a:p>
             <a:pPr lvl="0"/>
             <a:r>
-              <a:rPr lang="en-US" smtClean="0"/>
+              <a:rPr lang="en-US"/>
               <a:t>Click to edit Master text styles</a:t>
             </a:r>
           </a:p>
@@ -1705,38 +1823,37 @@
           <a:p>
             <a:pPr lvl="0"/>
             <a:r>
-              <a:rPr lang="en-US" smtClean="0"/>
+              <a:rPr lang="en-US"/>
               <a:t>Click to edit Master text styles</a:t>
             </a:r>
           </a:p>
           <a:p>
             <a:pPr lvl="1"/>
             <a:r>
-              <a:rPr lang="en-US" smtClean="0"/>
+              <a:rPr lang="en-US"/>
               <a:t>Second level</a:t>
             </a:r>
           </a:p>
           <a:p>
             <a:pPr lvl="2"/>
             <a:r>
-              <a:rPr lang="en-US" smtClean="0"/>
+              <a:rPr lang="en-US"/>
               <a:t>Third level</a:t>
             </a:r>
           </a:p>
           <a:p>
             <a:pPr lvl="3"/>
             <a:r>
-              <a:rPr lang="en-US" smtClean="0"/>
+              <a:rPr lang="en-US"/>
               <a:t>Fourth level</a:t>
             </a:r>
           </a:p>
           <a:p>
             <a:pPr lvl="4"/>
             <a:r>
-              <a:rPr lang="en-US" smtClean="0"/>
+              <a:rPr lang="en-US"/>
               <a:t>Fifth level</a:t>
             </a:r>
-            <a:endParaRPr lang="en-US"/>
           </a:p>
         </p:txBody>
       </p:sp>
@@ -1758,7 +1875,7 @@
             <a:fld id="{1D8BD707-D9CF-40AE-B4C6-C98DA3205C09}" type="datetimeFigureOut">
               <a:rPr lang="en-US" smtClean="0"/>
               <a:pPr/>
-              <a:t>8/1/2011</a:t>
+              <a:t>6/11/2026</a:t>
             </a:fld>
             <a:endParaRPr lang="en-US"/>
           </a:p>
@@ -1848,10 +1965,9 @@
           <a:lstStyle/>
           <a:p>
             <a:r>
-              <a:rPr lang="en-US" smtClean="0"/>
+              <a:rPr lang="en-US"/>
               <a:t>Click to edit Master title style</a:t>
             </a:r>
-            <a:endParaRPr lang="en-US"/>
           </a:p>
         </p:txBody>
       </p:sp>
@@ -1873,7 +1989,7 @@
             <a:fld id="{1D8BD707-D9CF-40AE-B4C6-C98DA3205C09}" type="datetimeFigureOut">
               <a:rPr lang="en-US" smtClean="0"/>
               <a:pPr/>
-              <a:t>8/1/2011</a:t>
+              <a:t>6/11/2026</a:t>
             </a:fld>
             <a:endParaRPr lang="en-US"/>
           </a:p>
@@ -1965,7 +2081,7 @@
             <a:fld id="{1D8BD707-D9CF-40AE-B4C6-C98DA3205C09}" type="datetimeFigureOut">
               <a:rPr lang="en-US" smtClean="0"/>
               <a:pPr/>
-              <a:t>8/1/2011</a:t>
+              <a:t>6/11/2026</a:t>
             </a:fld>
             <a:endParaRPr lang="en-US"/>
           </a:p>
@@ -2064,10 +2180,9 @@
           </a:lstStyle>
           <a:p>
             <a:r>
-              <a:rPr lang="en-US" smtClean="0"/>
+              <a:rPr lang="en-US"/>
               <a:t>Click to edit Master title style</a:t>
             </a:r>
-            <a:endParaRPr lang="en-US"/>
           </a:p>
         </p:txBody>
       </p:sp>
@@ -2121,38 +2236,37 @@
           <a:p>
             <a:pPr lvl="0"/>
             <a:r>
-              <a:rPr lang="en-US" smtClean="0"/>
+              <a:rPr lang="en-US"/>
               <a:t>Click to edit Master text styles</a:t>
             </a:r>
           </a:p>
           <a:p>
             <a:pPr lvl="1"/>
             <a:r>
-              <a:rPr lang="en-US" smtClean="0"/>
+              <a:rPr lang="en-US"/>
               <a:t>Second level</a:t>
             </a:r>
           </a:p>
           <a:p>
             <a:pPr lvl="2"/>
             <a:r>
-              <a:rPr lang="en-US" smtClean="0"/>
+              <a:rPr lang="en-US"/>
               <a:t>Third level</a:t>
             </a:r>
           </a:p>
           <a:p>
             <a:pPr lvl="3"/>
             <a:r>
-              <a:rPr lang="en-US" smtClean="0"/>
+              <a:rPr lang="en-US"/>
               <a:t>Fourth level</a:t>
             </a:r>
           </a:p>
           <a:p>
             <a:pPr lvl="4"/>
             <a:r>
-              <a:rPr lang="en-US" smtClean="0"/>
+              <a:rPr lang="en-US"/>
               <a:t>Fifth level</a:t>
             </a:r>
-            <a:endParaRPr lang="en-US"/>
           </a:p>
         </p:txBody>
       </p:sp>
@@ -2215,7 +2329,7 @@
           <a:p>
             <a:pPr lvl="0"/>
             <a:r>
-              <a:rPr lang="en-US" smtClean="0"/>
+              <a:rPr lang="en-US"/>
               <a:t>Click to edit Master text styles</a:t>
             </a:r>
           </a:p>
@@ -2239,7 +2353,7 @@
             <a:fld id="{1D8BD707-D9CF-40AE-B4C6-C98DA3205C09}" type="datetimeFigureOut">
               <a:rPr lang="en-US" smtClean="0"/>
               <a:pPr/>
-              <a:t>8/1/2011</a:t>
+              <a:t>6/11/2026</a:t>
             </a:fld>
             <a:endParaRPr lang="en-US"/>
           </a:p>
@@ -2338,10 +2452,9 @@
           </a:lstStyle>
           <a:p>
             <a:r>
-              <a:rPr lang="en-US" smtClean="0"/>
+              <a:rPr lang="en-US"/>
               <a:t>Click to edit Master title style</a:t>
             </a:r>
-            <a:endParaRPr lang="en-US"/>
           </a:p>
         </p:txBody>
       </p:sp>
@@ -2465,7 +2578,7 @@
           <a:p>
             <a:pPr lvl="0"/>
             <a:r>
-              <a:rPr lang="en-US" smtClean="0"/>
+              <a:rPr lang="en-US"/>
               <a:t>Click to edit Master text styles</a:t>
             </a:r>
           </a:p>
@@ -2489,7 +2602,7 @@
             <a:fld id="{1D8BD707-D9CF-40AE-B4C6-C98DA3205C09}" type="datetimeFigureOut">
               <a:rPr lang="en-US" smtClean="0"/>
               <a:pPr/>
-              <a:t>8/1/2011</a:t>
+              <a:t>6/11/2026</a:t>
             </a:fld>
             <a:endParaRPr lang="en-US"/>
           </a:p>
@@ -2594,10 +2707,9 @@
           <a:lstStyle/>
           <a:p>
             <a:r>
-              <a:rPr lang="en-US" smtClean="0"/>
+              <a:rPr lang="en-US"/>
               <a:t>Click to edit Master title style</a:t>
             </a:r>
-            <a:endParaRPr lang="en-US"/>
           </a:p>
         </p:txBody>
       </p:sp>
@@ -2628,38 +2740,37 @@
           <a:p>
             <a:pPr lvl="0"/>
             <a:r>
-              <a:rPr lang="en-US" smtClean="0"/>
+              <a:rPr lang="en-US"/>
               <a:t>Click to edit Master text styles</a:t>
             </a:r>
           </a:p>
           <a:p>
             <a:pPr lvl="1"/>
             <a:r>
-              <a:rPr lang="en-US" smtClean="0"/>
+              <a:rPr lang="en-US"/>
               <a:t>Second level</a:t>
             </a:r>
           </a:p>
           <a:p>
             <a:pPr lvl="2"/>
             <a:r>
-              <a:rPr lang="en-US" smtClean="0"/>
+              <a:rPr lang="en-US"/>
               <a:t>Third level</a:t>
             </a:r>
           </a:p>
           <a:p>
             <a:pPr lvl="3"/>
             <a:r>
-              <a:rPr lang="en-US" smtClean="0"/>
+              <a:rPr lang="en-US"/>
               <a:t>Fourth level</a:t>
             </a:r>
           </a:p>
           <a:p>
             <a:pPr lvl="4"/>
             <a:r>
-              <a:rPr lang="en-US" smtClean="0"/>
+              <a:rPr lang="en-US"/>
               <a:t>Fifth level</a:t>
             </a:r>
-            <a:endParaRPr lang="en-US"/>
           </a:p>
         </p:txBody>
       </p:sp>
@@ -2699,7 +2810,7 @@
             <a:fld id="{1D8BD707-D9CF-40AE-B4C6-C98DA3205C09}" type="datetimeFigureOut">
               <a:rPr lang="en-US" smtClean="0"/>
               <a:pPr/>
-              <a:t>8/1/2011</a:t>
+              <a:t>6/11/2026</a:t>
             </a:fld>
             <a:endParaRPr lang="en-US"/>
           </a:p>
@@ -3054,7 +3165,7 @@
 </file>
 
 <file path=ppt/slides/slide1.xml><?xml version="1.0" encoding="utf-8"?>
-<p:sld xmlns:p="http://schemas.openxmlformats.org/presentationml/2006/main" xmlns:a="http://schemas.openxmlformats.org/drawingml/2006/main" xmlns:r="http://schemas.openxmlformats.org/officeDocument/2006/relationships">
+<p:sld xmlns:a="http://schemas.openxmlformats.org/drawingml/2006/main" xmlns:r="http://schemas.openxmlformats.org/officeDocument/2006/relationships" xmlns:p="http://schemas.openxmlformats.org/presentationml/2006/main">
   <p:cSld>
     <p:spTree>
       <p:nvGrpSpPr>
@@ -3072,12 +3183,12 @@
       </p:grpSpPr>
       <p:sp>
         <p:nvSpPr>
-          <p:cNvPr name="Freeform 2" id="2"/>
+          <p:cNvPr id="2" name="Freeform 2"/>
           <p:cNvSpPr/>
           <p:nvPr/>
         </p:nvSpPr>
         <p:spPr>
-          <a:xfrm flipH="false" flipV="false" rot="-10800000">
+          <a:xfrm rot="-10800000">
             <a:off x="463820" y="597181"/>
             <a:ext cx="6732218" cy="328196"/>
           </a:xfrm>
@@ -3086,9 +3197,9 @@
             <a:gdLst/>
             <a:ahLst/>
             <a:cxnLst/>
-            <a:rect r="r" b="b" t="t" l="l"/>
+            <a:rect l="l" t="t" r="r" b="b"/>
             <a:pathLst>
-              <a:path h="328196" w="6732218">
+              <a:path w="6732218" h="328196">
                 <a:moveTo>
                   <a:pt x="0" y="0"/>
                 </a:moveTo>
@@ -3113,19 +3224,26 @@
               <a:alphaModFix amt="71000"/>
             </a:blip>
             <a:stretch>
-              <a:fillRect l="0" t="0" r="0" b="0"/>
+              <a:fillRect/>
             </a:stretch>
           </a:blipFill>
         </p:spPr>
-      </p:sp>
-      <p:sp>
-        <p:nvSpPr>
-          <p:cNvPr name="Freeform 3" id="3"/>
+        <p:txBody>
+          <a:bodyPr/>
+          <a:lstStyle/>
+          <a:p>
+            <a:endParaRPr lang="en-GB"/>
+          </a:p>
+        </p:txBody>
+      </p:sp>
+      <p:sp>
+        <p:nvSpPr>
+          <p:cNvPr id="3" name="Freeform 3"/>
           <p:cNvSpPr/>
           <p:nvPr/>
         </p:nvSpPr>
         <p:spPr>
-          <a:xfrm flipH="false" flipV="false" rot="-10800000">
+          <a:xfrm rot="-10800000">
             <a:off x="451176" y="5373942"/>
             <a:ext cx="6663475" cy="324844"/>
           </a:xfrm>
@@ -3134,9 +3252,9 @@
             <a:gdLst/>
             <a:ahLst/>
             <a:cxnLst/>
-            <a:rect r="r" b="b" t="t" l="l"/>
+            <a:rect l="l" t="t" r="r" b="b"/>
             <a:pathLst>
-              <a:path h="324844" w="6663475">
+              <a:path w="6663475" h="324844">
                 <a:moveTo>
                   <a:pt x="0" y="0"/>
                 </a:moveTo>
@@ -3161,14 +3279,21 @@
               <a:alphaModFix amt="71000"/>
             </a:blip>
             <a:stretch>
-              <a:fillRect l="0" t="0" r="0" b="0"/>
+              <a:fillRect/>
             </a:stretch>
           </a:blipFill>
         </p:spPr>
+        <p:txBody>
+          <a:bodyPr/>
+          <a:lstStyle/>
+          <a:p>
+            <a:endParaRPr lang="en-GB"/>
+          </a:p>
+        </p:txBody>
       </p:sp>
       <p:grpSp>
         <p:nvGrpSpPr>
-          <p:cNvPr name="Group 4" id="4"/>
+          <p:cNvPr id="4" name="Group 4"/>
           <p:cNvGrpSpPr/>
           <p:nvPr/>
         </p:nvGrpSpPr>
@@ -3182,12 +3307,12 @@
         </p:grpSpPr>
         <p:sp>
           <p:nvSpPr>
-            <p:cNvPr name="Freeform 5" id="5"/>
+            <p:cNvPr id="5" name="Freeform 5"/>
             <p:cNvSpPr/>
             <p:nvPr/>
           </p:nvSpPr>
           <p:spPr>
-            <a:xfrm flipH="false" flipV="false" rot="0">
+            <a:xfrm>
               <a:off x="4447" y="0"/>
               <a:ext cx="803906" cy="698500"/>
             </a:xfrm>
@@ -3196,9 +3321,9 @@
               <a:gdLst/>
               <a:ahLst/>
               <a:cxnLst/>
-              <a:rect r="r" b="b" t="t" l="l"/>
+              <a:rect l="l" t="t" r="r" b="b"/>
               <a:pathLst>
-                <a:path h="698500" w="803906">
+                <a:path w="803906" h="698500">
                   <a:moveTo>
                     <a:pt x="800062" y="363500"/>
                   </a:moveTo>
@@ -3258,11 +3383,18 @@
               <a:srgbClr val="ECECEC"/>
             </a:solidFill>
           </p:spPr>
+          <p:txBody>
+            <a:bodyPr/>
+            <a:lstStyle/>
+            <a:p>
+              <a:endParaRPr lang="en-GB"/>
+            </a:p>
+          </p:txBody>
         </p:sp>
         <p:sp>
           <p:nvSpPr>
-            <p:cNvPr name="TextBox 6" id="6"/>
-            <p:cNvSpPr txBox="true"/>
+            <p:cNvPr id="6" name="TextBox 6"/>
+            <p:cNvSpPr txBox="1"/>
             <p:nvPr/>
           </p:nvSpPr>
           <p:spPr>
@@ -3275,7 +3407,7 @@
             </a:prstGeom>
           </p:spPr>
           <p:txBody>
-            <a:bodyPr anchor="ctr" rtlCol="false" tIns="12344" lIns="12344" bIns="12344" rIns="12344"/>
+            <a:bodyPr lIns="12344" tIns="12344" rIns="12344" bIns="12344" rtlCol="0" anchor="ctr"/>
             <a:lstStyle/>
             <a:p>
               <a:pPr algn="ctr">
@@ -3283,18 +3415,19 @@
                   <a:spcPts val="377"/>
                 </a:lnSpc>
               </a:pPr>
+              <a:endParaRPr/>
             </a:p>
           </p:txBody>
         </p:sp>
       </p:grpSp>
       <p:sp>
         <p:nvSpPr>
-          <p:cNvPr name="Freeform 7" id="7"/>
+          <p:cNvPr id="7" name="Freeform 7"/>
           <p:cNvSpPr/>
           <p:nvPr/>
         </p:nvSpPr>
         <p:spPr>
-          <a:xfrm flipH="false" flipV="false" rot="-7421363">
+          <a:xfrm rot="-7421363">
             <a:off x="6898931" y="1330500"/>
             <a:ext cx="594215" cy="650807"/>
           </a:xfrm>
@@ -3303,9 +3436,9 @@
             <a:gdLst/>
             <a:ahLst/>
             <a:cxnLst/>
-            <a:rect r="r" b="b" t="t" l="l"/>
+            <a:rect l="l" t="t" r="r" b="b"/>
             <a:pathLst>
-              <a:path h="650807" w="594215">
+              <a:path w="594215" h="650807">
                 <a:moveTo>
                   <a:pt x="0" y="0"/>
                 </a:moveTo>
@@ -3326,27 +3459,34 @@
             </a:pathLst>
           </a:custGeom>
           <a:blipFill>
-            <a:blip r:embed="rId3">
+            <a:blip>
               <a:extLst>
                 <a:ext uri="{96DAC541-7B7A-43D3-8B79-37D633B846F1}">
-                  <asvg:svgBlip xmlns:asvg="http://schemas.microsoft.com/office/drawing/2016/SVG/main" r:embed="rId4"/>
+                  <asvg:svgBlip xmlns:asvg="http://schemas.microsoft.com/office/drawing/2016/SVG/main" r:embed="rId3"/>
                 </a:ext>
               </a:extLst>
             </a:blip>
             <a:stretch>
-              <a:fillRect l="0" t="0" r="0" b="0"/>
+              <a:fillRect/>
             </a:stretch>
           </a:blipFill>
         </p:spPr>
-      </p:sp>
-      <p:sp>
-        <p:nvSpPr>
-          <p:cNvPr name="Freeform 8" id="8"/>
+        <p:txBody>
+          <a:bodyPr/>
+          <a:lstStyle/>
+          <a:p>
+            <a:endParaRPr lang="en-GB"/>
+          </a:p>
+        </p:txBody>
+      </p:sp>
+      <p:sp>
+        <p:nvSpPr>
+          <p:cNvPr id="8" name="Freeform 8"/>
           <p:cNvSpPr/>
           <p:nvPr/>
         </p:nvSpPr>
         <p:spPr>
-          <a:xfrm flipH="false" flipV="false" rot="0">
+          <a:xfrm>
             <a:off x="385595" y="3365492"/>
             <a:ext cx="6735939" cy="328377"/>
           </a:xfrm>
@@ -3355,9 +3495,9 @@
             <a:gdLst/>
             <a:ahLst/>
             <a:cxnLst/>
-            <a:rect r="r" b="b" t="t" l="l"/>
+            <a:rect l="l" t="t" r="r" b="b"/>
             <a:pathLst>
-              <a:path h="328377" w="6735939">
+              <a:path w="6735939" h="328377">
                 <a:moveTo>
                   <a:pt x="0" y="0"/>
                 </a:moveTo>
@@ -3382,19 +3522,26 @@
               <a:alphaModFix amt="71000"/>
             </a:blip>
             <a:stretch>
-              <a:fillRect l="0" t="0" r="0" b="0"/>
+              <a:fillRect/>
             </a:stretch>
           </a:blipFill>
         </p:spPr>
+        <p:txBody>
+          <a:bodyPr/>
+          <a:lstStyle/>
+          <a:p>
+            <a:endParaRPr lang="en-GB"/>
+          </a:p>
+        </p:txBody>
       </p:sp>
       <p:grpSp>
         <p:nvGrpSpPr>
-          <p:cNvPr name="Group 9" id="9"/>
+          <p:cNvPr id="9" name="Group 9"/>
           <p:cNvGrpSpPr/>
           <p:nvPr/>
         </p:nvGrpSpPr>
         <p:grpSpPr>
-          <a:xfrm rot="0">
+          <a:xfrm>
             <a:off x="451176" y="1057705"/>
             <a:ext cx="6663475" cy="2398716"/>
             <a:chOff x="0" y="0"/>
@@ -3403,12 +3550,12 @@
         </p:grpSpPr>
         <p:sp>
           <p:nvSpPr>
-            <p:cNvPr name="Freeform 10" id="10"/>
+            <p:cNvPr id="10" name="Freeform 10"/>
             <p:cNvSpPr/>
             <p:nvPr/>
           </p:nvSpPr>
           <p:spPr>
-            <a:xfrm flipH="false" flipV="false" rot="0">
+            <a:xfrm>
               <a:off x="0" y="0"/>
               <a:ext cx="5085655" cy="1830733"/>
             </a:xfrm>
@@ -3417,9 +3564,9 @@
               <a:gdLst/>
               <a:ahLst/>
               <a:cxnLst/>
-              <a:rect r="r" b="b" t="t" l="l"/>
+              <a:rect l="l" t="t" r="r" b="b"/>
               <a:pathLst>
-                <a:path h="1830733" w="5085655">
+                <a:path w="5085655" h="1830733">
                   <a:moveTo>
                     <a:pt x="6100" y="0"/>
                   </a:moveTo>
@@ -3478,11 +3625,18 @@
               <a:srgbClr val="FAFAFA"/>
             </a:solidFill>
           </p:spPr>
+          <p:txBody>
+            <a:bodyPr/>
+            <a:lstStyle/>
+            <a:p>
+              <a:endParaRPr lang="en-GB"/>
+            </a:p>
+          </p:txBody>
         </p:sp>
         <p:sp>
           <p:nvSpPr>
-            <p:cNvPr name="TextBox 11" id="11"/>
-            <p:cNvSpPr txBox="true"/>
+            <p:cNvPr id="11" name="TextBox 11"/>
+            <p:cNvSpPr txBox="1"/>
             <p:nvPr/>
           </p:nvSpPr>
           <p:spPr>
@@ -3495,7 +3649,7 @@
             </a:prstGeom>
           </p:spPr>
           <p:txBody>
-            <a:bodyPr anchor="ctr" rtlCol="false" tIns="12344" lIns="12344" bIns="12344" rIns="12344"/>
+            <a:bodyPr lIns="12344" tIns="12344" rIns="12344" bIns="12344" rtlCol="0" anchor="ctr"/>
             <a:lstStyle/>
             <a:p>
               <a:pPr algn="ctr">
@@ -3503,18 +3657,19 @@
                   <a:spcPts val="377"/>
                 </a:lnSpc>
               </a:pPr>
+              <a:endParaRPr/>
             </a:p>
           </p:txBody>
         </p:sp>
       </p:grpSp>
       <p:grpSp>
         <p:nvGrpSpPr>
-          <p:cNvPr name="Group 12" id="12"/>
+          <p:cNvPr id="12" name="Group 12"/>
           <p:cNvGrpSpPr/>
           <p:nvPr/>
         </p:nvGrpSpPr>
         <p:grpSpPr>
-          <a:xfrm rot="0">
+          <a:xfrm>
             <a:off x="451176" y="848780"/>
             <a:ext cx="6663475" cy="1486413"/>
             <a:chOff x="0" y="0"/>
@@ -3523,12 +3678,12 @@
         </p:grpSpPr>
         <p:sp>
           <p:nvSpPr>
-            <p:cNvPr name="Freeform 13" id="13"/>
+            <p:cNvPr id="13" name="Freeform 13"/>
             <p:cNvSpPr/>
             <p:nvPr/>
           </p:nvSpPr>
           <p:spPr>
-            <a:xfrm flipH="false" flipV="false" rot="0">
+            <a:xfrm>
               <a:off x="0" y="0"/>
               <a:ext cx="3005068" cy="670337"/>
             </a:xfrm>
@@ -3537,9 +3692,9 @@
               <a:gdLst/>
               <a:ahLst/>
               <a:cxnLst/>
-              <a:rect r="r" b="b" t="t" l="l"/>
+              <a:rect l="l" t="t" r="r" b="b"/>
               <a:pathLst>
-                <a:path h="670337" w="3005068">
+                <a:path w="3005068" h="670337">
                   <a:moveTo>
                     <a:pt x="7842" y="0"/>
                   </a:moveTo>
@@ -3580,22 +3735,29 @@
               </a:pathLst>
             </a:custGeom>
             <a:blipFill>
-              <a:blip r:embed="rId5"/>
+              <a:blip r:embed="rId4"/>
               <a:stretch>
-                <a:fillRect l="0" t="-94357" r="0" b="-104317"/>
+                <a:fillRect t="-94357" b="-104317"/>
               </a:stretch>
             </a:blipFill>
           </p:spPr>
+          <p:txBody>
+            <a:bodyPr/>
+            <a:lstStyle/>
+            <a:p>
+              <a:endParaRPr lang="en-GB"/>
+            </a:p>
+          </p:txBody>
         </p:sp>
       </p:grpSp>
       <p:grpSp>
         <p:nvGrpSpPr>
-          <p:cNvPr name="Group 14" id="14"/>
+          <p:cNvPr id="14" name="Group 14"/>
           <p:cNvGrpSpPr/>
           <p:nvPr/>
         </p:nvGrpSpPr>
         <p:grpSpPr>
-          <a:xfrm rot="0">
+          <a:xfrm>
             <a:off x="451176" y="2083612"/>
             <a:ext cx="6663475" cy="416395"/>
             <a:chOff x="0" y="0"/>
@@ -3604,12 +3766,12 @@
         </p:grpSpPr>
         <p:sp>
           <p:nvSpPr>
-            <p:cNvPr name="Freeform 15" id="15"/>
+            <p:cNvPr id="15" name="Freeform 15"/>
             <p:cNvSpPr/>
             <p:nvPr/>
           </p:nvSpPr>
           <p:spPr>
-            <a:xfrm flipH="false" flipV="false" rot="0">
+            <a:xfrm>
               <a:off x="0" y="0"/>
               <a:ext cx="5085655" cy="317799"/>
             </a:xfrm>
@@ -3618,9 +3780,9 @@
               <a:gdLst/>
               <a:ahLst/>
               <a:cxnLst/>
-              <a:rect r="r" b="b" t="t" l="l"/>
+              <a:rect l="l" t="t" r="r" b="b"/>
               <a:pathLst>
-                <a:path h="317799" w="5085655">
+                <a:path w="5085655" h="317799">
                   <a:moveTo>
                     <a:pt x="0" y="0"/>
                   </a:moveTo>
@@ -3641,11 +3803,18 @@
               <a:srgbClr val="FAFAFA"/>
             </a:solidFill>
           </p:spPr>
+          <p:txBody>
+            <a:bodyPr/>
+            <a:lstStyle/>
+            <a:p>
+              <a:endParaRPr lang="en-GB"/>
+            </a:p>
+          </p:txBody>
         </p:sp>
         <p:sp>
           <p:nvSpPr>
-            <p:cNvPr name="TextBox 16" id="16"/>
-            <p:cNvSpPr txBox="true"/>
+            <p:cNvPr id="16" name="TextBox 16"/>
+            <p:cNvSpPr txBox="1"/>
             <p:nvPr/>
           </p:nvSpPr>
           <p:spPr>
@@ -3658,7 +3827,7 @@
             </a:prstGeom>
           </p:spPr>
           <p:txBody>
-            <a:bodyPr anchor="ctr" rtlCol="false" tIns="12344" lIns="12344" bIns="12344" rIns="12344"/>
+            <a:bodyPr lIns="12344" tIns="12344" rIns="12344" bIns="12344" rtlCol="0" anchor="ctr"/>
             <a:lstStyle/>
             <a:p>
               <a:pPr algn="ctr">
@@ -3666,18 +3835,19 @@
                   <a:spcPts val="377"/>
                 </a:lnSpc>
               </a:pPr>
+              <a:endParaRPr/>
             </a:p>
           </p:txBody>
         </p:sp>
       </p:grpSp>
       <p:grpSp>
         <p:nvGrpSpPr>
-          <p:cNvPr name="Group 17" id="17"/>
+          <p:cNvPr id="17" name="Group 17"/>
           <p:cNvGrpSpPr/>
           <p:nvPr/>
         </p:nvGrpSpPr>
         <p:grpSpPr>
-          <a:xfrm rot="0">
+          <a:xfrm>
             <a:off x="5586774" y="311575"/>
             <a:ext cx="1609264" cy="361187"/>
             <a:chOff x="0" y="0"/>
@@ -3686,12 +3856,12 @@
         </p:grpSpPr>
         <p:sp>
           <p:nvSpPr>
-            <p:cNvPr name="Freeform 18" id="18"/>
+            <p:cNvPr id="18" name="Freeform 18"/>
             <p:cNvSpPr/>
             <p:nvPr/>
           </p:nvSpPr>
           <p:spPr>
-            <a:xfrm flipH="false" flipV="false" rot="0">
+            <a:xfrm>
               <a:off x="0" y="0"/>
               <a:ext cx="1228212" cy="275663"/>
             </a:xfrm>
@@ -3700,9 +3870,9 @@
               <a:gdLst/>
               <a:ahLst/>
               <a:cxnLst/>
-              <a:rect r="r" b="b" t="t" l="l"/>
+              <a:rect l="l" t="t" r="r" b="b"/>
               <a:pathLst>
-                <a:path h="275663" w="1228212">
+                <a:path w="1228212" h="275663">
                   <a:moveTo>
                     <a:pt x="25257" y="0"/>
                   </a:moveTo>
@@ -3753,11 +3923,18 @@
               <a:miter/>
             </a:ln>
           </p:spPr>
+          <p:txBody>
+            <a:bodyPr/>
+            <a:lstStyle/>
+            <a:p>
+              <a:endParaRPr lang="en-GB"/>
+            </a:p>
+          </p:txBody>
         </p:sp>
         <p:sp>
           <p:nvSpPr>
-            <p:cNvPr name="TextBox 19" id="19"/>
-            <p:cNvSpPr txBox="true"/>
+            <p:cNvPr id="19" name="TextBox 19"/>
+            <p:cNvSpPr txBox="1"/>
             <p:nvPr/>
           </p:nvSpPr>
           <p:spPr>
@@ -3770,7 +3947,7 @@
             </a:prstGeom>
           </p:spPr>
           <p:txBody>
-            <a:bodyPr anchor="ctr" rtlCol="false" tIns="12344" lIns="12344" bIns="12344" rIns="12344"/>
+            <a:bodyPr lIns="12344" tIns="12344" rIns="12344" bIns="12344" rtlCol="0" anchor="ctr"/>
             <a:lstStyle/>
             <a:p>
               <a:pPr algn="ctr">
@@ -3778,13 +3955,14 @@
                   <a:spcPts val="424"/>
                 </a:lnSpc>
               </a:pPr>
+              <a:endParaRPr/>
             </a:p>
           </p:txBody>
         </p:sp>
       </p:grpSp>
       <p:grpSp>
         <p:nvGrpSpPr>
-          <p:cNvPr name="Group 20" id="20"/>
+          <p:cNvPr id="20" name="Group 20"/>
           <p:cNvGrpSpPr/>
           <p:nvPr/>
         </p:nvGrpSpPr>
@@ -3798,12 +3976,12 @@
         </p:grpSpPr>
         <p:sp>
           <p:nvSpPr>
-            <p:cNvPr name="Freeform 21" id="21"/>
+            <p:cNvPr id="21" name="Freeform 21"/>
             <p:cNvSpPr/>
             <p:nvPr/>
           </p:nvSpPr>
           <p:spPr>
-            <a:xfrm flipH="false" flipV="false" rot="0">
+            <a:xfrm>
               <a:off x="4907" y="0"/>
               <a:ext cx="802985" cy="698500"/>
             </a:xfrm>
@@ -3812,9 +3990,9 @@
               <a:gdLst/>
               <a:ahLst/>
               <a:cxnLst/>
-              <a:rect r="r" b="b" t="t" l="l"/>
+              <a:rect l="l" t="t" r="r" b="b"/>
               <a:pathLst>
-                <a:path h="698500" w="802985">
+                <a:path w="802985" h="698500">
                   <a:moveTo>
                     <a:pt x="798744" y="364975"/>
                   </a:moveTo>
@@ -3874,11 +4052,18 @@
               <a:srgbClr val="ECECEC"/>
             </a:solidFill>
           </p:spPr>
+          <p:txBody>
+            <a:bodyPr/>
+            <a:lstStyle/>
+            <a:p>
+              <a:endParaRPr lang="en-GB"/>
+            </a:p>
+          </p:txBody>
         </p:sp>
         <p:sp>
           <p:nvSpPr>
-            <p:cNvPr name="TextBox 22" id="22"/>
-            <p:cNvSpPr txBox="true"/>
+            <p:cNvPr id="22" name="TextBox 22"/>
+            <p:cNvSpPr txBox="1"/>
             <p:nvPr/>
           </p:nvSpPr>
           <p:spPr>
@@ -3891,7 +4076,7 @@
             </a:prstGeom>
           </p:spPr>
           <p:txBody>
-            <a:bodyPr anchor="ctr" rtlCol="false" tIns="12344" lIns="12344" bIns="12344" rIns="12344"/>
+            <a:bodyPr lIns="12344" tIns="12344" rIns="12344" bIns="12344" rtlCol="0" anchor="ctr"/>
             <a:lstStyle/>
             <a:p>
               <a:pPr algn="ctr">
@@ -3899,18 +4084,19 @@
                   <a:spcPts val="377"/>
                 </a:lnSpc>
               </a:pPr>
+              <a:endParaRPr/>
             </a:p>
           </p:txBody>
         </p:sp>
       </p:grpSp>
       <p:sp>
         <p:nvSpPr>
-          <p:cNvPr name="Freeform 23" id="23"/>
+          <p:cNvPr id="23" name="Freeform 23"/>
           <p:cNvSpPr/>
           <p:nvPr/>
         </p:nvSpPr>
         <p:spPr>
-          <a:xfrm flipH="false" flipV="false" rot="0">
+          <a:xfrm>
             <a:off x="385595" y="9715623"/>
             <a:ext cx="6735939" cy="328377"/>
           </a:xfrm>
@@ -3919,9 +4105,9 @@
             <a:gdLst/>
             <a:ahLst/>
             <a:cxnLst/>
-            <a:rect r="r" b="b" t="t" l="l"/>
+            <a:rect l="l" t="t" r="r" b="b"/>
             <a:pathLst>
-              <a:path h="328377" w="6735939">
+              <a:path w="6735939" h="328377">
                 <a:moveTo>
                   <a:pt x="0" y="0"/>
                 </a:moveTo>
@@ -3946,19 +4132,26 @@
               <a:alphaModFix amt="71000"/>
             </a:blip>
             <a:stretch>
-              <a:fillRect l="0" t="0" r="0" b="0"/>
+              <a:fillRect/>
             </a:stretch>
           </a:blipFill>
         </p:spPr>
-      </p:sp>
-      <p:sp>
-        <p:nvSpPr>
-          <p:cNvPr name="Freeform 24" id="24"/>
+        <p:txBody>
+          <a:bodyPr/>
+          <a:lstStyle/>
+          <a:p>
+            <a:endParaRPr lang="en-GB"/>
+          </a:p>
+        </p:txBody>
+      </p:sp>
+      <p:sp>
+        <p:nvSpPr>
+          <p:cNvPr id="24" name="Freeform 24"/>
           <p:cNvSpPr/>
           <p:nvPr/>
         </p:nvSpPr>
         <p:spPr>
-          <a:xfrm flipH="false" flipV="false" rot="-3908437">
+          <a:xfrm rot="-3908437">
             <a:off x="-59438" y="8152361"/>
             <a:ext cx="1076545" cy="1179073"/>
           </a:xfrm>
@@ -3967,9 +4160,9 @@
             <a:gdLst/>
             <a:ahLst/>
             <a:cxnLst/>
-            <a:rect r="r" b="b" t="t" l="l"/>
+            <a:rect l="l" t="t" r="r" b="b"/>
             <a:pathLst>
-              <a:path h="1179073" w="1076545">
+              <a:path w="1076545" h="1179073">
                 <a:moveTo>
                   <a:pt x="0" y="0"/>
                 </a:moveTo>
@@ -3990,27 +4183,34 @@
             </a:pathLst>
           </a:custGeom>
           <a:blipFill>
-            <a:blip r:embed="rId3">
+            <a:blip>
               <a:extLst>
                 <a:ext uri="{96DAC541-7B7A-43D3-8B79-37D633B846F1}">
-                  <asvg:svgBlip xmlns:asvg="http://schemas.microsoft.com/office/drawing/2016/SVG/main" r:embed="rId4"/>
+                  <asvg:svgBlip xmlns:asvg="http://schemas.microsoft.com/office/drawing/2016/SVG/main" r:embed="rId3"/>
                 </a:ext>
               </a:extLst>
             </a:blip>
             <a:stretch>
-              <a:fillRect l="0" t="0" r="0" b="0"/>
+              <a:fillRect/>
             </a:stretch>
           </a:blipFill>
         </p:spPr>
+        <p:txBody>
+          <a:bodyPr/>
+          <a:lstStyle/>
+          <a:p>
+            <a:endParaRPr lang="en-GB"/>
+          </a:p>
+        </p:txBody>
       </p:sp>
       <p:grpSp>
         <p:nvGrpSpPr>
-          <p:cNvPr name="Group 25" id="25"/>
+          <p:cNvPr id="25" name="Group 25"/>
           <p:cNvGrpSpPr/>
           <p:nvPr/>
         </p:nvGrpSpPr>
         <p:grpSpPr>
-          <a:xfrm rot="0">
+          <a:xfrm>
             <a:off x="451176" y="5573290"/>
             <a:ext cx="6663475" cy="4216369"/>
             <a:chOff x="0" y="0"/>
@@ -4019,12 +4219,12 @@
         </p:grpSpPr>
         <p:sp>
           <p:nvSpPr>
-            <p:cNvPr name="Freeform 26" id="26"/>
+            <p:cNvPr id="26" name="Freeform 26"/>
             <p:cNvSpPr/>
             <p:nvPr/>
           </p:nvSpPr>
           <p:spPr>
-            <a:xfrm flipH="false" flipV="false" rot="0">
+            <a:xfrm>
               <a:off x="0" y="0"/>
               <a:ext cx="5085655" cy="3217990"/>
             </a:xfrm>
@@ -4033,9 +4233,9 @@
               <a:gdLst/>
               <a:ahLst/>
               <a:cxnLst/>
-              <a:rect r="r" b="b" t="t" l="l"/>
+              <a:rect l="l" t="t" r="r" b="b"/>
               <a:pathLst>
-                <a:path h="3217990" w="5085655">
+                <a:path w="5085655" h="3217990">
                   <a:moveTo>
                     <a:pt x="16266" y="0"/>
                   </a:moveTo>
@@ -4094,11 +4294,18 @@
               <a:srgbClr val="FAFAFA"/>
             </a:solidFill>
           </p:spPr>
+          <p:txBody>
+            <a:bodyPr/>
+            <a:lstStyle/>
+            <a:p>
+              <a:endParaRPr lang="en-GB"/>
+            </a:p>
+          </p:txBody>
         </p:sp>
         <p:sp>
           <p:nvSpPr>
-            <p:cNvPr name="TextBox 27" id="27"/>
-            <p:cNvSpPr txBox="true"/>
+            <p:cNvPr id="27" name="TextBox 27"/>
+            <p:cNvSpPr txBox="1"/>
             <p:nvPr/>
           </p:nvSpPr>
           <p:spPr>
@@ -4111,7 +4318,7 @@
             </a:prstGeom>
           </p:spPr>
           <p:txBody>
-            <a:bodyPr anchor="ctr" rtlCol="false" tIns="16732" lIns="16732" bIns="16732" rIns="16732"/>
+            <a:bodyPr lIns="16732" tIns="16732" rIns="16732" bIns="16732" rtlCol="0" anchor="ctr"/>
             <a:lstStyle/>
             <a:p>
               <a:pPr algn="ctr">
@@ -4119,18 +4326,19 @@
                   <a:spcPts val="377"/>
                 </a:lnSpc>
               </a:pPr>
+              <a:endParaRPr/>
             </a:p>
           </p:txBody>
         </p:sp>
       </p:grpSp>
       <p:sp>
         <p:nvSpPr>
-          <p:cNvPr name="Freeform 28" id="28"/>
+          <p:cNvPr id="28" name="Freeform 28"/>
           <p:cNvSpPr/>
           <p:nvPr/>
         </p:nvSpPr>
         <p:spPr>
-          <a:xfrm flipH="false" flipV="false" rot="0">
+          <a:xfrm>
             <a:off x="5713028" y="5720041"/>
             <a:ext cx="1284685" cy="1284685"/>
           </a:xfrm>
@@ -4139,9 +4347,9 @@
             <a:gdLst/>
             <a:ahLst/>
             <a:cxnLst/>
-            <a:rect r="r" b="b" t="t" l="l"/>
+            <a:rect l="l" t="t" r="r" b="b"/>
             <a:pathLst>
-              <a:path h="1284685" w="1284685">
+              <a:path w="1284685" h="1284685">
                 <a:moveTo>
                   <a:pt x="0" y="0"/>
                 </a:moveTo>
@@ -4162,27 +4370,34 @@
             </a:pathLst>
           </a:custGeom>
           <a:blipFill>
-            <a:blip r:embed="rId6">
+            <a:blip>
               <a:extLst>
                 <a:ext uri="{96DAC541-7B7A-43D3-8B79-37D633B846F1}">
-                  <asvg:svgBlip xmlns:asvg="http://schemas.microsoft.com/office/drawing/2016/SVG/main" r:embed="rId7"/>
+                  <asvg:svgBlip xmlns:asvg="http://schemas.microsoft.com/office/drawing/2016/SVG/main" r:embed="rId5"/>
                 </a:ext>
               </a:extLst>
             </a:blip>
             <a:stretch>
-              <a:fillRect l="0" t="0" r="0" b="0"/>
+              <a:fillRect/>
             </a:stretch>
           </a:blipFill>
         </p:spPr>
-      </p:sp>
-      <p:sp>
-        <p:nvSpPr>
-          <p:cNvPr name="Freeform 29" id="29"/>
+        <p:txBody>
+          <a:bodyPr/>
+          <a:lstStyle/>
+          <a:p>
+            <a:endParaRPr lang="en-GB"/>
+          </a:p>
+        </p:txBody>
+      </p:sp>
+      <p:sp>
+        <p:nvSpPr>
+          <p:cNvPr id="29" name="Freeform 29"/>
           <p:cNvSpPr/>
           <p:nvPr/>
         </p:nvSpPr>
         <p:spPr>
-          <a:xfrm flipH="false" flipV="false" rot="0">
+          <a:xfrm>
             <a:off x="4542802" y="10604218"/>
             <a:ext cx="130522" cy="130522"/>
           </a:xfrm>
@@ -4191,9 +4406,9 @@
             <a:gdLst/>
             <a:ahLst/>
             <a:cxnLst/>
-            <a:rect r="r" b="b" t="t" l="l"/>
+            <a:rect l="l" t="t" r="r" b="b"/>
             <a:pathLst>
-              <a:path h="130522" w="130522">
+              <a:path w="130522" h="130522">
                 <a:moveTo>
                   <a:pt x="0" y="0"/>
                 </a:moveTo>
@@ -4214,27 +4429,34 @@
             </a:pathLst>
           </a:custGeom>
           <a:blipFill>
-            <a:blip r:embed="rId8">
+            <a:blip>
               <a:extLst>
                 <a:ext uri="{96DAC541-7B7A-43D3-8B79-37D633B846F1}">
-                  <asvg:svgBlip xmlns:asvg="http://schemas.microsoft.com/office/drawing/2016/SVG/main" r:embed="rId9"/>
+                  <asvg:svgBlip xmlns:asvg="http://schemas.microsoft.com/office/drawing/2016/SVG/main" r:embed="rId6"/>
                 </a:ext>
               </a:extLst>
             </a:blip>
             <a:stretch>
-              <a:fillRect l="0" t="0" r="0" b="0"/>
+              <a:fillRect/>
             </a:stretch>
           </a:blipFill>
         </p:spPr>
-      </p:sp>
-      <p:sp>
-        <p:nvSpPr>
-          <p:cNvPr name="Freeform 30" id="30"/>
+        <p:txBody>
+          <a:bodyPr/>
+          <a:lstStyle/>
+          <a:p>
+            <a:endParaRPr lang="en-GB"/>
+          </a:p>
+        </p:txBody>
+      </p:sp>
+      <p:sp>
+        <p:nvSpPr>
+          <p:cNvPr id="30" name="Freeform 30"/>
           <p:cNvSpPr/>
           <p:nvPr/>
         </p:nvSpPr>
         <p:spPr>
-          <a:xfrm flipH="false" flipV="false" rot="0">
+          <a:xfrm>
             <a:off x="2894336" y="10604218"/>
             <a:ext cx="130522" cy="130522"/>
           </a:xfrm>
@@ -4243,9 +4465,9 @@
             <a:gdLst/>
             <a:ahLst/>
             <a:cxnLst/>
-            <a:rect r="r" b="b" t="t" l="l"/>
+            <a:rect l="l" t="t" r="r" b="b"/>
             <a:pathLst>
-              <a:path h="130522" w="130522">
+              <a:path w="130522" h="130522">
                 <a:moveTo>
                   <a:pt x="0" y="0"/>
                 </a:moveTo>
@@ -4266,27 +4488,34 @@
             </a:pathLst>
           </a:custGeom>
           <a:blipFill>
-            <a:blip r:embed="rId8">
+            <a:blip>
               <a:extLst>
                 <a:ext uri="{96DAC541-7B7A-43D3-8B79-37D633B846F1}">
-                  <asvg:svgBlip xmlns:asvg="http://schemas.microsoft.com/office/drawing/2016/SVG/main" r:embed="rId9"/>
+                  <asvg:svgBlip xmlns:asvg="http://schemas.microsoft.com/office/drawing/2016/SVG/main" r:embed="rId6"/>
                 </a:ext>
               </a:extLst>
             </a:blip>
             <a:stretch>
-              <a:fillRect l="0" t="0" r="0" b="0"/>
+              <a:fillRect/>
             </a:stretch>
           </a:blipFill>
         </p:spPr>
-      </p:sp>
-      <p:sp>
-        <p:nvSpPr>
-          <p:cNvPr name="Freeform 31" id="31"/>
+        <p:txBody>
+          <a:bodyPr/>
+          <a:lstStyle/>
+          <a:p>
+            <a:endParaRPr lang="en-GB"/>
+          </a:p>
+        </p:txBody>
+      </p:sp>
+      <p:sp>
+        <p:nvSpPr>
+          <p:cNvPr id="31" name="Freeform 31"/>
           <p:cNvSpPr/>
           <p:nvPr/>
         </p:nvSpPr>
         <p:spPr>
-          <a:xfrm flipH="false" flipV="false" rot="0">
+          <a:xfrm>
             <a:off x="451176" y="254017"/>
             <a:ext cx="949525" cy="413789"/>
           </a:xfrm>
@@ -4295,9 +4524,9 @@
             <a:gdLst/>
             <a:ahLst/>
             <a:cxnLst/>
-            <a:rect r="r" b="b" t="t" l="l"/>
+            <a:rect l="l" t="t" r="r" b="b"/>
             <a:pathLst>
-              <a:path h="413789" w="949525">
+              <a:path w="949525" h="413789">
                 <a:moveTo>
                   <a:pt x="0" y="0"/>
                 </a:moveTo>
@@ -4318,21 +4547,28 @@
             </a:pathLst>
           </a:custGeom>
           <a:blipFill>
-            <a:blip r:embed="rId10"/>
+            <a:blip r:embed="rId7"/>
             <a:stretch>
-              <a:fillRect l="0" t="0" r="0" b="0"/>
+              <a:fillRect/>
             </a:stretch>
           </a:blipFill>
         </p:spPr>
+        <p:txBody>
+          <a:bodyPr/>
+          <a:lstStyle/>
+          <a:p>
+            <a:endParaRPr lang="en-GB"/>
+          </a:p>
+        </p:txBody>
       </p:sp>
       <p:grpSp>
         <p:nvGrpSpPr>
-          <p:cNvPr name="Group 32" id="32"/>
+          <p:cNvPr id="32" name="Group 32"/>
           <p:cNvGrpSpPr/>
           <p:nvPr/>
         </p:nvGrpSpPr>
         <p:grpSpPr>
-          <a:xfrm rot="0">
+          <a:xfrm>
             <a:off x="5051132" y="1858485"/>
             <a:ext cx="1799794" cy="797156"/>
             <a:chOff x="0" y="0"/>
@@ -4341,12 +4577,12 @@
         </p:grpSpPr>
         <p:sp>
           <p:nvSpPr>
-            <p:cNvPr name="Freeform 33" id="33"/>
+            <p:cNvPr id="33" name="Freeform 33"/>
             <p:cNvSpPr/>
             <p:nvPr/>
           </p:nvSpPr>
           <p:spPr>
-            <a:xfrm flipH="false" flipV="false" rot="0">
+            <a:xfrm>
               <a:off x="0" y="0"/>
               <a:ext cx="1373628" cy="608400"/>
             </a:xfrm>
@@ -4355,9 +4591,9 @@
               <a:gdLst/>
               <a:ahLst/>
               <a:cxnLst/>
-              <a:rect r="r" b="b" t="t" l="l"/>
+              <a:rect l="l" t="t" r="r" b="b"/>
               <a:pathLst>
-                <a:path h="608400" w="1373628">
+                <a:path w="1373628" h="608400">
                   <a:moveTo>
                     <a:pt x="68825" y="0"/>
                   </a:moveTo>
@@ -4423,11 +4659,18 @@
               <a:miter/>
             </a:ln>
           </p:spPr>
+          <p:txBody>
+            <a:bodyPr/>
+            <a:lstStyle/>
+            <a:p>
+              <a:endParaRPr lang="en-GB"/>
+            </a:p>
+          </p:txBody>
         </p:sp>
         <p:sp>
           <p:nvSpPr>
-            <p:cNvPr name="TextBox 34" id="34"/>
-            <p:cNvSpPr txBox="true"/>
+            <p:cNvPr id="34" name="TextBox 34"/>
+            <p:cNvSpPr txBox="1"/>
             <p:nvPr/>
           </p:nvSpPr>
           <p:spPr>
@@ -4440,10 +4683,10 @@
             </a:prstGeom>
           </p:spPr>
           <p:txBody>
-            <a:bodyPr anchor="ctr" rtlCol="false" tIns="16732" lIns="16732" bIns="16732" rIns="16732"/>
+            <a:bodyPr lIns="16732" tIns="16732" rIns="16732" bIns="16732" rtlCol="0" anchor="ctr"/>
             <a:lstStyle/>
             <a:p>
-              <a:pPr algn="l" marL="0" indent="0" lvl="0">
+              <a:pPr marL="0" lvl="0" indent="0" algn="l">
                 <a:lnSpc>
                   <a:spcPts val="1540"/>
                 </a:lnSpc>
@@ -4451,18 +4694,19 @@
                   <a:spcPct val="0"/>
                 </a:spcBef>
               </a:pPr>
+              <a:endParaRPr/>
             </a:p>
           </p:txBody>
         </p:sp>
       </p:grpSp>
       <p:sp>
         <p:nvSpPr>
-          <p:cNvPr name="Freeform 35" id="35"/>
+          <p:cNvPr id="35" name="Freeform 35"/>
           <p:cNvSpPr/>
           <p:nvPr/>
         </p:nvSpPr>
         <p:spPr>
-          <a:xfrm flipH="false" flipV="false" rot="0">
+          <a:xfrm>
             <a:off x="5158800" y="2106000"/>
             <a:ext cx="1573729" cy="320400"/>
           </a:xfrm>
@@ -4471,9 +4715,9 @@
             <a:gdLst/>
             <a:ahLst/>
             <a:cxnLst/>
-            <a:rect r="r" b="b" t="t" l="l"/>
+            <a:rect l="l" t="t" r="r" b="b"/>
             <a:pathLst>
-              <a:path h="320400" w="1573729">
+              <a:path w="1573729" h="320400">
                 <a:moveTo>
                   <a:pt x="0" y="0"/>
                 </a:moveTo>
@@ -4494,27 +4738,34 @@
             </a:pathLst>
           </a:custGeom>
           <a:blipFill>
-            <a:blip r:embed="rId11">
+            <a:blip>
               <a:extLst>
                 <a:ext uri="{96DAC541-7B7A-43D3-8B79-37D633B846F1}">
-                  <asvg:svgBlip xmlns:asvg="http://schemas.microsoft.com/office/drawing/2016/SVG/main" r:embed="rId12"/>
+                  <asvg:svgBlip xmlns:asvg="http://schemas.microsoft.com/office/drawing/2016/SVG/main" r:embed="rId8"/>
                 </a:ext>
               </a:extLst>
             </a:blip>
             <a:stretch>
-              <a:fillRect l="0" t="0" r="0" b="0"/>
+              <a:fillRect/>
             </a:stretch>
           </a:blipFill>
         </p:spPr>
+        <p:txBody>
+          <a:bodyPr/>
+          <a:lstStyle/>
+          <a:p>
+            <a:endParaRPr lang="en-GB"/>
+          </a:p>
+        </p:txBody>
       </p:sp>
       <p:grpSp>
         <p:nvGrpSpPr>
-          <p:cNvPr name="Group 36" id="36"/>
+          <p:cNvPr id="36" name="Group 36"/>
           <p:cNvGrpSpPr/>
           <p:nvPr/>
         </p:nvGrpSpPr>
         <p:grpSpPr>
-          <a:xfrm rot="0">
+          <a:xfrm>
             <a:off x="463820" y="10313488"/>
             <a:ext cx="2495776" cy="241569"/>
             <a:chOff x="0" y="0"/>
@@ -4523,12 +4774,12 @@
         </p:grpSpPr>
         <p:sp>
           <p:nvSpPr>
-            <p:cNvPr name="Freeform 37" id="37"/>
+            <p:cNvPr id="37" name="Freeform 37"/>
             <p:cNvSpPr/>
             <p:nvPr/>
           </p:nvSpPr>
           <p:spPr>
-            <a:xfrm flipH="false" flipV="false" rot="0">
+            <a:xfrm>
               <a:off x="0" y="0"/>
               <a:ext cx="308606" cy="322092"/>
             </a:xfrm>
@@ -4537,9 +4788,9 @@
               <a:gdLst/>
               <a:ahLst/>
               <a:cxnLst/>
-              <a:rect r="r" b="b" t="t" l="l"/>
+              <a:rect l="l" t="t" r="r" b="b"/>
               <a:pathLst>
-                <a:path h="322092" w="308606">
+                <a:path w="308606" h="322092">
                   <a:moveTo>
                     <a:pt x="0" y="0"/>
                   </a:moveTo>
@@ -4560,21 +4811,28 @@
               </a:pathLst>
             </a:custGeom>
             <a:blipFill>
-              <a:blip r:embed="rId10"/>
+              <a:blip r:embed="rId7"/>
               <a:stretch>
-                <a:fillRect l="0" t="0" r="-139499" b="0"/>
+                <a:fillRect r="-139499"/>
               </a:stretch>
             </a:blipFill>
           </p:spPr>
+          <p:txBody>
+            <a:bodyPr/>
+            <a:lstStyle/>
+            <a:p>
+              <a:endParaRPr lang="en-GB"/>
+            </a:p>
+          </p:txBody>
         </p:sp>
         <p:sp>
           <p:nvSpPr>
-            <p:cNvPr name="TextBox 38" id="38"/>
-            <p:cNvSpPr txBox="true"/>
+            <p:cNvPr id="38" name="TextBox 38"/>
+            <p:cNvSpPr txBox="1"/>
             <p:nvPr/>
           </p:nvSpPr>
           <p:spPr>
-            <a:xfrm rot="0">
+            <a:xfrm>
               <a:off x="390385" y="45518"/>
               <a:ext cx="2937316" cy="213828"/>
             </a:xfrm>
@@ -4583,7 +4841,7 @@
             </a:prstGeom>
           </p:spPr>
           <p:txBody>
-            <a:bodyPr anchor="t" rtlCol="false" tIns="0" lIns="0" bIns="0" rIns="0">
+            <a:bodyPr lIns="0" tIns="0" rIns="0" bIns="0" rtlCol="0" anchor="t">
               <a:spAutoFit/>
             </a:bodyPr>
             <a:lstStyle/>
@@ -4602,7 +4860,7 @@
                   <a:ea typeface="Aller 1"/>
                   <a:cs typeface="Aller 1"/>
                   <a:sym typeface="Aller 1"/>
-                  <a:hlinkClick r:id="rId13" tooltip="https://www.squareoneresources.com"/>
+                  <a:hlinkClick r:id="rId9" tooltip="https://www.squareoneresources.com"/>
                 </a:rPr>
                 <a:t>squareoneresources.com</a:t>
               </a:r>
@@ -4612,21 +4870,21 @@
       </p:grpSp>
       <p:sp>
         <p:nvSpPr>
-          <p:cNvPr name="TextBox 39" id="39"/>
-          <p:cNvSpPr txBox="true"/>
+          <p:cNvPr id="39" name="TextBox 39"/>
+          <p:cNvSpPr txBox="1"/>
           <p:nvPr/>
         </p:nvSpPr>
         <p:spPr>
-          <a:xfrm rot="0">
+          <a:xfrm>
             <a:off x="682422" y="2402250"/>
-            <a:ext cx="4185812" cy="698500"/>
+            <a:ext cx="4185812" cy="692497"/>
           </a:xfrm>
           <a:prstGeom prst="rect">
             <a:avLst/>
           </a:prstGeom>
         </p:spPr>
         <p:txBody>
-          <a:bodyPr anchor="t" rtlCol="false" tIns="0" lIns="0" bIns="0" rIns="0">
+          <a:bodyPr lIns="0" tIns="0" rIns="0" bIns="0" rtlCol="0" anchor="t">
             <a:spAutoFit/>
           </a:bodyPr>
           <a:lstStyle/>
@@ -4637,7 +4895,7 @@
               </a:lnSpc>
             </a:pPr>
             <a:r>
-              <a:rPr lang="en-US" sz="2499">
+              <a:rPr lang="en-US" sz="2499" dirty="0">
                 <a:solidFill>
                   <a:srgbClr val="000000"/>
                 </a:solidFill>
@@ -4653,26 +4911,26 @@
       </p:sp>
       <p:grpSp>
         <p:nvGrpSpPr>
-          <p:cNvPr name="Group 40" id="40"/>
+          <p:cNvPr id="40" name="Group 40"/>
           <p:cNvGrpSpPr/>
           <p:nvPr/>
         </p:nvGrpSpPr>
         <p:grpSpPr>
-          <a:xfrm rot="0">
-            <a:off x="451176" y="3789119"/>
-            <a:ext cx="6670359" cy="696204"/>
-            <a:chOff x="0" y="0"/>
-            <a:chExt cx="8893812" cy="928272"/>
+          <a:xfrm>
+            <a:off x="451176" y="3803406"/>
+            <a:ext cx="6670359" cy="475061"/>
+            <a:chOff x="0" y="19050"/>
+            <a:chExt cx="8893812" cy="633415"/>
           </a:xfrm>
         </p:grpSpPr>
         <p:sp>
           <p:nvSpPr>
-            <p:cNvPr name="TextBox 41" id="41"/>
-            <p:cNvSpPr txBox="true"/>
+            <p:cNvPr id="41" name="TextBox 41"/>
+            <p:cNvSpPr txBox="1"/>
             <p:nvPr/>
           </p:nvSpPr>
           <p:spPr>
-            <a:xfrm rot="0">
+            <a:xfrm>
               <a:off x="0" y="19050"/>
               <a:ext cx="3046717" cy="286414"/>
             </a:xfrm>
@@ -4681,7 +4939,7 @@
             </a:prstGeom>
           </p:spPr>
           <p:txBody>
-            <a:bodyPr anchor="t" rtlCol="false" tIns="0" lIns="0" bIns="0" rIns="0">
+            <a:bodyPr lIns="0" tIns="0" rIns="0" bIns="0" rtlCol="0" anchor="t">
               <a:spAutoFit/>
             </a:bodyPr>
             <a:lstStyle/>
@@ -4708,21 +4966,21 @@
         </p:sp>
         <p:sp>
           <p:nvSpPr>
-            <p:cNvPr name="TextBox 42" id="42"/>
-            <p:cNvSpPr txBox="true"/>
+            <p:cNvPr id="42" name="TextBox 42"/>
+            <p:cNvSpPr txBox="1"/>
             <p:nvPr/>
           </p:nvSpPr>
           <p:spPr>
-            <a:xfrm rot="0">
+            <a:xfrm>
               <a:off x="10853" y="382049"/>
-              <a:ext cx="8882959" cy="546223"/>
+              <a:ext cx="8882959" cy="270416"/>
             </a:xfrm>
             <a:prstGeom prst="rect">
               <a:avLst/>
             </a:prstGeom>
           </p:spPr>
           <p:txBody>
-            <a:bodyPr anchor="t" rtlCol="false" tIns="0" lIns="0" bIns="0" rIns="0">
+            <a:bodyPr lIns="0" tIns="0" rIns="0" bIns="0" rtlCol="0" anchor="t">
               <a:spAutoFit/>
             </a:bodyPr>
             <a:lstStyle/>
@@ -4733,7 +4991,7 @@
                 </a:lnSpc>
               </a:pPr>
               <a:r>
-                <a:rPr lang="en-US" sz="1215">
+                <a:rPr lang="en-US" sz="1215" dirty="0">
                   <a:solidFill>
                     <a:srgbClr val="000000"/>
                   </a:solidFill>
@@ -4745,33 +5003,26 @@
                 <a:t>[CLIENT_OVERVIEW_PLACEHOLDER_MAXCHAR(540)]</a:t>
               </a:r>
             </a:p>
-            <a:p>
-              <a:pPr algn="l">
-                <a:lnSpc>
-                  <a:spcPts val="1701"/>
-                </a:lnSpc>
-              </a:pPr>
-            </a:p>
           </p:txBody>
         </p:sp>
       </p:grpSp>
       <p:sp>
         <p:nvSpPr>
-          <p:cNvPr name="TextBox 43" id="43"/>
-          <p:cNvSpPr txBox="true"/>
+          <p:cNvPr id="43" name="TextBox 43"/>
+          <p:cNvSpPr txBox="1"/>
           <p:nvPr/>
         </p:nvSpPr>
         <p:spPr>
-          <a:xfrm rot="0">
+          <a:xfrm>
             <a:off x="656203" y="6147854"/>
-            <a:ext cx="6194723" cy="2093211"/>
+            <a:ext cx="6194723" cy="1946880"/>
           </a:xfrm>
           <a:prstGeom prst="rect">
             <a:avLst/>
           </a:prstGeom>
         </p:spPr>
         <p:txBody>
-          <a:bodyPr anchor="t" rtlCol="false" tIns="0" lIns="0" bIns="0" rIns="0">
+          <a:bodyPr lIns="0" tIns="0" rIns="0" bIns="0" rtlCol="0" anchor="t">
             <a:spAutoFit/>
           </a:bodyPr>
           <a:lstStyle/>
@@ -4782,7 +5033,7 @@
               </a:lnSpc>
             </a:pPr>
             <a:r>
-              <a:rPr lang="en-US" sz="1215">
+              <a:rPr lang="en-US" sz="1215" dirty="0">
                 <a:solidFill>
                   <a:srgbClr val="000000"/>
                 </a:solidFill>
@@ -4800,9 +5051,18 @@
                 <a:spcPts val="1701"/>
               </a:lnSpc>
             </a:pPr>
-          </a:p>
-          <a:p>
-            <a:pPr algn="l" marL="262343" indent="-131171" lvl="1">
+            <a:endParaRPr lang="en-US" sz="1215" dirty="0">
+              <a:solidFill>
+                <a:srgbClr val="000000"/>
+              </a:solidFill>
+              <a:latin typeface="Aller 2"/>
+              <a:ea typeface="Aller 2"/>
+              <a:cs typeface="Aller 2"/>
+              <a:sym typeface="Aller 2"/>
+            </a:endParaRPr>
+          </a:p>
+          <a:p>
+            <a:pPr marL="262343" lvl="1" indent="-131171" algn="l">
               <a:lnSpc>
                 <a:spcPts val="1701"/>
               </a:lnSpc>
@@ -4810,7 +5070,7 @@
               <a:buChar char="•"/>
             </a:pPr>
             <a:r>
-              <a:rPr lang="en-US" sz="1215">
+              <a:rPr lang="en-US" sz="1215" dirty="0">
                 <a:solidFill>
                   <a:srgbClr val="000000"/>
                 </a:solidFill>
@@ -4823,7 +5083,7 @@
             </a:r>
           </a:p>
           <a:p>
-            <a:pPr algn="l" marL="262343" indent="-131171" lvl="1">
+            <a:pPr marL="262343" lvl="1" indent="-131171" algn="l">
               <a:lnSpc>
                 <a:spcPts val="1701"/>
               </a:lnSpc>
@@ -4831,7 +5091,7 @@
               <a:buChar char="•"/>
             </a:pPr>
             <a:r>
-              <a:rPr lang="en-US" sz="1215">
+              <a:rPr lang="en-US" sz="1215" dirty="0">
                 <a:solidFill>
                   <a:srgbClr val="000000"/>
                 </a:solidFill>
@@ -4840,10 +5100,19 @@
                 <a:cs typeface="Aller 2"/>
                 <a:sym typeface="Aller 2"/>
               </a:rPr>
-              <a:t>[OUR_APPROACH_BULLE</a:t>
-            </a:r>
-            <a:r>
-              <a:rPr lang="en-US" sz="1215">
+              <a:t>[OUR_APPROACH_BULLET2_MAXCHAR(65)]</a:t>
+            </a:r>
+          </a:p>
+          <a:p>
+            <a:pPr marL="262343" lvl="1" indent="-131171" algn="l">
+              <a:lnSpc>
+                <a:spcPts val="1701"/>
+              </a:lnSpc>
+              <a:buFont typeface="Arial"/>
+              <a:buChar char="•"/>
+            </a:pPr>
+            <a:r>
+              <a:rPr lang="en-US" sz="1215" dirty="0">
                 <a:solidFill>
                   <a:srgbClr val="000000"/>
                 </a:solidFill>
@@ -4852,11 +5121,11 @@
                 <a:cs typeface="Aller 2"/>
                 <a:sym typeface="Aller 2"/>
               </a:rPr>
-              <a:t>T2_MAXCHAR(65)]</a:t>
-            </a:r>
-          </a:p>
-          <a:p>
-            <a:pPr algn="l" marL="262343" indent="-131171" lvl="1">
+              <a:t>[OUR_APPROACH_BULLET3_MAXCHAR(65)]</a:t>
+            </a:r>
+          </a:p>
+          <a:p>
+            <a:pPr marL="262343" lvl="1" indent="-131171" algn="l">
               <a:lnSpc>
                 <a:spcPts val="1701"/>
               </a:lnSpc>
@@ -4864,40 +5133,7 @@
               <a:buChar char="•"/>
             </a:pPr>
             <a:r>
-              <a:rPr lang="en-US" sz="1215">
-                <a:solidFill>
-                  <a:srgbClr val="000000"/>
-                </a:solidFill>
-                <a:latin typeface="Aller 2"/>
-                <a:ea typeface="Aller 2"/>
-                <a:cs typeface="Aller 2"/>
-                <a:sym typeface="Aller 2"/>
-              </a:rPr>
-              <a:t>[OUR_APPROACH_</a:t>
-            </a:r>
-            <a:r>
-              <a:rPr lang="en-US" sz="1215">
-                <a:solidFill>
-                  <a:srgbClr val="000000"/>
-                </a:solidFill>
-                <a:latin typeface="Aller 2"/>
-                <a:ea typeface="Aller 2"/>
-                <a:cs typeface="Aller 2"/>
-                <a:sym typeface="Aller 2"/>
-              </a:rPr>
-              <a:t>BULLET3_MAXCHAR(65)]</a:t>
-            </a:r>
-          </a:p>
-          <a:p>
-            <a:pPr algn="l" marL="262343" indent="-131171" lvl="1">
-              <a:lnSpc>
-                <a:spcPts val="1701"/>
-              </a:lnSpc>
-              <a:buFont typeface="Arial"/>
-              <a:buChar char="•"/>
-            </a:pPr>
-            <a:r>
-              <a:rPr lang="en-US" sz="1215">
+              <a:rPr lang="en-US" sz="1215" dirty="0">
                 <a:solidFill>
                   <a:srgbClr val="000000"/>
                 </a:solidFill>
@@ -4910,7 +5146,7 @@
             </a:r>
           </a:p>
           <a:p>
-            <a:pPr algn="l" marL="262343" indent="-131171" lvl="1">
+            <a:pPr marL="262343" lvl="1" indent="-131171" algn="l">
               <a:lnSpc>
                 <a:spcPts val="1701"/>
               </a:lnSpc>
@@ -4918,7 +5154,7 @@
               <a:buChar char="•"/>
             </a:pPr>
             <a:r>
-              <a:rPr lang="en-US" sz="1215">
+              <a:rPr lang="en-US" sz="1215" dirty="0">
                 <a:solidFill>
                   <a:srgbClr val="000000"/>
                 </a:solidFill>
@@ -4927,19 +5163,7 @@
                 <a:cs typeface="Aller 2"/>
                 <a:sym typeface="Aller 2"/>
               </a:rPr>
-              <a:t>[OUR_APPROACH_BULLET5_MAXCHAR(65)</a:t>
-            </a:r>
-            <a:r>
-              <a:rPr lang="en-US" sz="1215">
-                <a:solidFill>
-                  <a:srgbClr val="000000"/>
-                </a:solidFill>
-                <a:latin typeface="Aller 2"/>
-                <a:ea typeface="Aller 2"/>
-                <a:cs typeface="Aller 2"/>
-                <a:sym typeface="Aller 2"/>
-              </a:rPr>
-              <a:t>]</a:t>
+              <a:t>[OUR_APPROACH_BULLET5_MAXCHAR(65)]</a:t>
             </a:r>
           </a:p>
           <a:p>
@@ -4948,6 +5172,15 @@
                 <a:spcPts val="1701"/>
               </a:lnSpc>
             </a:pPr>
+            <a:endParaRPr lang="en-US" sz="1215" dirty="0">
+              <a:solidFill>
+                <a:srgbClr val="000000"/>
+              </a:solidFill>
+              <a:latin typeface="Aller 2"/>
+              <a:ea typeface="Aller 2"/>
+              <a:cs typeface="Aller 2"/>
+              <a:sym typeface="Aller 2"/>
+            </a:endParaRPr>
           </a:p>
           <a:p>
             <a:pPr algn="l">
@@ -4956,7 +5189,7 @@
               </a:lnSpc>
             </a:pPr>
             <a:r>
-              <a:rPr lang="en-US" sz="1215">
+              <a:rPr lang="en-US" sz="1215" dirty="0">
                 <a:solidFill>
                   <a:srgbClr val="000000"/>
                 </a:solidFill>
@@ -4968,23 +5201,16 @@
               <a:t>[OUR_APPROACH_PLACEHOLDER_2_MAXCHAR(320)]</a:t>
             </a:r>
           </a:p>
-          <a:p>
-            <a:pPr algn="l">
-              <a:lnSpc>
-                <a:spcPts val="1701"/>
-              </a:lnSpc>
-            </a:pPr>
-          </a:p>
-        </p:txBody>
-      </p:sp>
-      <p:sp>
-        <p:nvSpPr>
-          <p:cNvPr name="TextBox 44" id="44"/>
-          <p:cNvSpPr txBox="true"/>
+        </p:txBody>
+      </p:sp>
+      <p:sp>
+        <p:nvSpPr>
+          <p:cNvPr id="44" name="TextBox 44"/>
+          <p:cNvSpPr txBox="1"/>
           <p:nvPr/>
         </p:nvSpPr>
         <p:spPr>
-          <a:xfrm rot="0">
+          <a:xfrm>
             <a:off x="656203" y="5866967"/>
             <a:ext cx="3491317" cy="210024"/>
           </a:xfrm>
@@ -4993,12 +5219,12 @@
           </a:prstGeom>
         </p:spPr>
         <p:txBody>
-          <a:bodyPr anchor="t" rtlCol="false" tIns="0" lIns="0" bIns="0" rIns="0">
+          <a:bodyPr lIns="0" tIns="0" rIns="0" bIns="0" rtlCol="0" anchor="t">
             <a:spAutoFit/>
           </a:bodyPr>
           <a:lstStyle/>
           <a:p>
-            <a:pPr algn="l" marL="0" indent="0" lvl="0">
+            <a:pPr marL="0" lvl="0" indent="0" algn="l">
               <a:lnSpc>
                 <a:spcPts val="1597"/>
               </a:lnSpc>
@@ -5007,7 +5233,7 @@
               </a:spcBef>
             </a:pPr>
             <a:r>
-              <a:rPr lang="en-US" b="true" sz="1521" strike="noStrike" u="none">
+              <a:rPr lang="en-US" sz="1521" b="1" u="none" strike="noStrike">
                 <a:solidFill>
                   <a:srgbClr val="1F5E9E"/>
                 </a:solidFill>
@@ -5016,43 +5242,19 @@
                 <a:cs typeface="Aller 1"/>
                 <a:sym typeface="Aller 1"/>
               </a:rPr>
-              <a:t>Our Approa</a:t>
-            </a:r>
-            <a:r>
-              <a:rPr lang="en-US" b="true" sz="1521" strike="noStrike" u="none">
-                <a:solidFill>
-                  <a:srgbClr val="1F5E9E"/>
-                </a:solidFill>
-                <a:latin typeface="Aller 1"/>
-                <a:ea typeface="Aller 1"/>
-                <a:cs typeface="Aller 1"/>
-                <a:sym typeface="Aller 1"/>
-              </a:rPr>
-              <a:t>c</a:t>
-            </a:r>
-            <a:r>
-              <a:rPr lang="en-US" b="true" sz="1521" strike="noStrike" u="none">
-                <a:solidFill>
-                  <a:srgbClr val="1F5E9E"/>
-                </a:solidFill>
-                <a:latin typeface="Aller 1"/>
-                <a:ea typeface="Aller 1"/>
-                <a:cs typeface="Aller 1"/>
-                <a:sym typeface="Aller 1"/>
-              </a:rPr>
-              <a:t>h</a:t>
-            </a:r>
-          </a:p>
-        </p:txBody>
-      </p:sp>
-      <p:sp>
-        <p:nvSpPr>
-          <p:cNvPr name="TextBox 45" id="45"/>
-          <p:cNvSpPr txBox="true"/>
+              <a:t>Our Approach</a:t>
+            </a:r>
+          </a:p>
+        </p:txBody>
+      </p:sp>
+      <p:sp>
+        <p:nvSpPr>
+          <p:cNvPr id="45" name="TextBox 45"/>
+          <p:cNvSpPr txBox="1"/>
           <p:nvPr/>
         </p:nvSpPr>
         <p:spPr>
-          <a:xfrm rot="0">
+          <a:xfrm>
             <a:off x="5276212" y="368012"/>
             <a:ext cx="2202987" cy="219738"/>
           </a:xfrm>
@@ -5061,7 +5263,7 @@
           </a:prstGeom>
         </p:spPr>
         <p:txBody>
-          <a:bodyPr anchor="t" rtlCol="false" tIns="0" lIns="0" bIns="0" rIns="0">
+          <a:bodyPr lIns="0" tIns="0" rIns="0" bIns="0" rtlCol="0" anchor="t">
             <a:spAutoFit/>
           </a:bodyPr>
           <a:lstStyle/>
@@ -5095,7 +5297,7 @@
 </file>
 
 <file path=ppt/slides/slide2.xml><?xml version="1.0" encoding="utf-8"?>
-<p:sld xmlns:p="http://schemas.openxmlformats.org/presentationml/2006/main" xmlns:a="http://schemas.openxmlformats.org/drawingml/2006/main" xmlns:r="http://schemas.openxmlformats.org/officeDocument/2006/relationships">
+<p:sld xmlns:a="http://schemas.openxmlformats.org/drawingml/2006/main" xmlns:r="http://schemas.openxmlformats.org/officeDocument/2006/relationships" xmlns:p="http://schemas.openxmlformats.org/presentationml/2006/main">
   <p:cSld>
     <p:spTree>
       <p:nvGrpSpPr>
@@ -5113,12 +5315,12 @@
       </p:grpSpPr>
       <p:grpSp>
         <p:nvGrpSpPr>
-          <p:cNvPr name="Group 2" id="2"/>
+          <p:cNvPr id="2" name="Group 2"/>
           <p:cNvGrpSpPr/>
           <p:nvPr/>
         </p:nvGrpSpPr>
         <p:grpSpPr>
-          <a:xfrm rot="0">
+          <a:xfrm>
             <a:off x="5514774" y="311575"/>
             <a:ext cx="1609264" cy="361187"/>
             <a:chOff x="0" y="0"/>
@@ -5127,12 +5329,12 @@
         </p:grpSpPr>
         <p:sp>
           <p:nvSpPr>
-            <p:cNvPr name="Freeform 3" id="3"/>
+            <p:cNvPr id="3" name="Freeform 3"/>
             <p:cNvSpPr/>
             <p:nvPr/>
           </p:nvSpPr>
           <p:spPr>
-            <a:xfrm flipH="false" flipV="false" rot="0">
+            <a:xfrm>
               <a:off x="0" y="0"/>
               <a:ext cx="1228212" cy="275663"/>
             </a:xfrm>
@@ -5141,9 +5343,9 @@
               <a:gdLst/>
               <a:ahLst/>
               <a:cxnLst/>
-              <a:rect r="r" b="b" t="t" l="l"/>
+              <a:rect l="l" t="t" r="r" b="b"/>
               <a:pathLst>
-                <a:path h="275663" w="1228212">
+                <a:path w="1228212" h="275663">
                   <a:moveTo>
                     <a:pt x="25257" y="0"/>
                   </a:moveTo>
@@ -5194,11 +5396,18 @@
               <a:miter/>
             </a:ln>
           </p:spPr>
+          <p:txBody>
+            <a:bodyPr/>
+            <a:lstStyle/>
+            <a:p>
+              <a:endParaRPr lang="en-GB"/>
+            </a:p>
+          </p:txBody>
         </p:sp>
         <p:sp>
           <p:nvSpPr>
-            <p:cNvPr name="TextBox 4" id="4"/>
-            <p:cNvSpPr txBox="true"/>
+            <p:cNvPr id="4" name="TextBox 4"/>
+            <p:cNvSpPr txBox="1"/>
             <p:nvPr/>
           </p:nvSpPr>
           <p:spPr>
@@ -5211,7 +5420,7 @@
             </a:prstGeom>
           </p:spPr>
           <p:txBody>
-            <a:bodyPr anchor="ctr" rtlCol="false" tIns="12344" lIns="12344" bIns="12344" rIns="12344"/>
+            <a:bodyPr lIns="12344" tIns="12344" rIns="12344" bIns="12344" rtlCol="0" anchor="ctr"/>
             <a:lstStyle/>
             <a:p>
               <a:pPr algn="ctr">
@@ -5219,13 +5428,14 @@
                   <a:spcPts val="424"/>
                 </a:lnSpc>
               </a:pPr>
+              <a:endParaRPr/>
             </a:p>
           </p:txBody>
         </p:sp>
       </p:grpSp>
       <p:grpSp>
         <p:nvGrpSpPr>
-          <p:cNvPr name="Group 5" id="5"/>
+          <p:cNvPr id="5" name="Group 5"/>
           <p:cNvGrpSpPr/>
           <p:nvPr/>
         </p:nvGrpSpPr>
@@ -5239,12 +5449,12 @@
         </p:grpSpPr>
         <p:sp>
           <p:nvSpPr>
-            <p:cNvPr name="Freeform 6" id="6"/>
+            <p:cNvPr id="6" name="Freeform 6"/>
             <p:cNvSpPr/>
             <p:nvPr/>
           </p:nvSpPr>
           <p:spPr>
-            <a:xfrm flipH="false" flipV="false" rot="0">
+            <a:xfrm>
               <a:off x="4447" y="0"/>
               <a:ext cx="803906" cy="698500"/>
             </a:xfrm>
@@ -5253,9 +5463,9 @@
               <a:gdLst/>
               <a:ahLst/>
               <a:cxnLst/>
-              <a:rect r="r" b="b" t="t" l="l"/>
+              <a:rect l="l" t="t" r="r" b="b"/>
               <a:pathLst>
-                <a:path h="698500" w="803906">
+                <a:path w="803906" h="698500">
                   <a:moveTo>
                     <a:pt x="800062" y="363500"/>
                   </a:moveTo>
@@ -5315,11 +5525,18 @@
               <a:srgbClr val="ECECEC"/>
             </a:solidFill>
           </p:spPr>
+          <p:txBody>
+            <a:bodyPr/>
+            <a:lstStyle/>
+            <a:p>
+              <a:endParaRPr lang="en-GB"/>
+            </a:p>
+          </p:txBody>
         </p:sp>
         <p:sp>
           <p:nvSpPr>
-            <p:cNvPr name="TextBox 7" id="7"/>
-            <p:cNvSpPr txBox="true"/>
+            <p:cNvPr id="7" name="TextBox 7"/>
+            <p:cNvSpPr txBox="1"/>
             <p:nvPr/>
           </p:nvSpPr>
           <p:spPr>
@@ -5332,7 +5549,7 @@
             </a:prstGeom>
           </p:spPr>
           <p:txBody>
-            <a:bodyPr anchor="ctr" rtlCol="false" tIns="12344" lIns="12344" bIns="12344" rIns="12344"/>
+            <a:bodyPr lIns="12344" tIns="12344" rIns="12344" bIns="12344" rtlCol="0" anchor="ctr"/>
             <a:lstStyle/>
             <a:p>
               <a:pPr algn="ctr">
@@ -5340,18 +5557,19 @@
                   <a:spcPts val="377"/>
                 </a:lnSpc>
               </a:pPr>
+              <a:endParaRPr/>
             </a:p>
           </p:txBody>
         </p:sp>
       </p:grpSp>
       <p:sp>
         <p:nvSpPr>
-          <p:cNvPr name="Freeform 8" id="8"/>
+          <p:cNvPr id="8" name="Freeform 8"/>
           <p:cNvSpPr/>
           <p:nvPr/>
         </p:nvSpPr>
         <p:spPr>
-          <a:xfrm flipH="false" flipV="false" rot="0">
+          <a:xfrm>
             <a:off x="484334" y="3010550"/>
             <a:ext cx="6641450" cy="323771"/>
           </a:xfrm>
@@ -5360,9 +5578,9 @@
             <a:gdLst/>
             <a:ahLst/>
             <a:cxnLst/>
-            <a:rect r="r" b="b" t="t" l="l"/>
+            <a:rect l="l" t="t" r="r" b="b"/>
             <a:pathLst>
-              <a:path h="323771" w="6641450">
+              <a:path w="6641450" h="323771">
                 <a:moveTo>
                   <a:pt x="0" y="0"/>
                 </a:moveTo>
@@ -5387,19 +5605,26 @@
               <a:alphaModFix amt="71000"/>
             </a:blip>
             <a:stretch>
-              <a:fillRect l="0" t="0" r="0" b="0"/>
+              <a:fillRect/>
             </a:stretch>
           </a:blipFill>
         </p:spPr>
-      </p:sp>
-      <p:sp>
-        <p:nvSpPr>
-          <p:cNvPr name="Freeform 9" id="9"/>
+        <p:txBody>
+          <a:bodyPr/>
+          <a:lstStyle/>
+          <a:p>
+            <a:endParaRPr lang="en-GB"/>
+          </a:p>
+        </p:txBody>
+      </p:sp>
+      <p:sp>
+        <p:nvSpPr>
+          <p:cNvPr id="9" name="Freeform 9"/>
           <p:cNvSpPr/>
           <p:nvPr/>
         </p:nvSpPr>
         <p:spPr>
-          <a:xfrm flipH="false" flipV="false" rot="0">
+          <a:xfrm>
             <a:off x="422730" y="10038645"/>
             <a:ext cx="6714540" cy="327334"/>
           </a:xfrm>
@@ -5408,9 +5633,9 @@
             <a:gdLst/>
             <a:ahLst/>
             <a:cxnLst/>
-            <a:rect r="r" b="b" t="t" l="l"/>
+            <a:rect l="l" t="t" r="r" b="b"/>
             <a:pathLst>
-              <a:path h="327334" w="6714540">
+              <a:path w="6714540" h="327334">
                 <a:moveTo>
                   <a:pt x="0" y="0"/>
                 </a:moveTo>
@@ -5435,19 +5660,26 @@
               <a:alphaModFix amt="71000"/>
             </a:blip>
             <a:stretch>
-              <a:fillRect l="0" t="0" r="0" b="0"/>
+              <a:fillRect/>
             </a:stretch>
           </a:blipFill>
         </p:spPr>
-      </p:sp>
-      <p:sp>
-        <p:nvSpPr>
-          <p:cNvPr name="Freeform 10" id="10"/>
+        <p:txBody>
+          <a:bodyPr/>
+          <a:lstStyle/>
+          <a:p>
+            <a:endParaRPr lang="en-GB"/>
+          </a:p>
+        </p:txBody>
+      </p:sp>
+      <p:sp>
+        <p:nvSpPr>
+          <p:cNvPr id="10" name="Freeform 10"/>
           <p:cNvSpPr/>
           <p:nvPr/>
         </p:nvSpPr>
         <p:spPr>
-          <a:xfrm flipH="false" flipV="false" rot="0">
+          <a:xfrm>
             <a:off x="389845" y="2950340"/>
             <a:ext cx="6735939" cy="328377"/>
           </a:xfrm>
@@ -5456,9 +5688,9 @@
             <a:gdLst/>
             <a:ahLst/>
             <a:cxnLst/>
-            <a:rect r="r" b="b" t="t" l="l"/>
+            <a:rect l="l" t="t" r="r" b="b"/>
             <a:pathLst>
-              <a:path h="328377" w="6735939">
+              <a:path w="6735939" h="328377">
                 <a:moveTo>
                   <a:pt x="0" y="0"/>
                 </a:moveTo>
@@ -5483,19 +5715,26 @@
               <a:alphaModFix amt="71000"/>
             </a:blip>
             <a:stretch>
-              <a:fillRect l="0" t="0" r="0" b="0"/>
+              <a:fillRect/>
             </a:stretch>
           </a:blipFill>
         </p:spPr>
-      </p:sp>
-      <p:sp>
-        <p:nvSpPr>
-          <p:cNvPr name="Freeform 11" id="11"/>
+        <p:txBody>
+          <a:bodyPr/>
+          <a:lstStyle/>
+          <a:p>
+            <a:endParaRPr lang="en-GB"/>
+          </a:p>
+        </p:txBody>
+      </p:sp>
+      <p:sp>
+        <p:nvSpPr>
+          <p:cNvPr id="11" name="Freeform 11"/>
           <p:cNvSpPr/>
           <p:nvPr/>
         </p:nvSpPr>
         <p:spPr>
-          <a:xfrm flipH="false" flipV="false" rot="-10800000">
+          <a:xfrm rot="-10800000">
             <a:off x="473200" y="745279"/>
             <a:ext cx="6688695" cy="326074"/>
           </a:xfrm>
@@ -5504,9 +5743,9 @@
             <a:gdLst/>
             <a:ahLst/>
             <a:cxnLst/>
-            <a:rect r="r" b="b" t="t" l="l"/>
+            <a:rect l="l" t="t" r="r" b="b"/>
             <a:pathLst>
-              <a:path h="326074" w="6688695">
+              <a:path w="6688695" h="326074">
                 <a:moveTo>
                   <a:pt x="0" y="0"/>
                 </a:moveTo>
@@ -5531,19 +5770,26 @@
               <a:alphaModFix amt="71000"/>
             </a:blip>
             <a:stretch>
-              <a:fillRect l="0" t="0" r="0" b="0"/>
+              <a:fillRect/>
             </a:stretch>
           </a:blipFill>
         </p:spPr>
-      </p:sp>
-      <p:sp>
-        <p:nvSpPr>
-          <p:cNvPr name="Freeform 12" id="12"/>
+        <p:txBody>
+          <a:bodyPr/>
+          <a:lstStyle/>
+          <a:p>
+            <a:endParaRPr lang="en-GB"/>
+          </a:p>
+        </p:txBody>
+      </p:sp>
+      <p:sp>
+        <p:nvSpPr>
+          <p:cNvPr id="12" name="Freeform 12"/>
           <p:cNvSpPr/>
           <p:nvPr/>
         </p:nvSpPr>
         <p:spPr>
-          <a:xfrm flipH="false" flipV="false" rot="-3908437">
+          <a:xfrm rot="-3908437">
             <a:off x="-115542" y="1713276"/>
             <a:ext cx="1076545" cy="1179073"/>
           </a:xfrm>
@@ -5552,9 +5798,9 @@
             <a:gdLst/>
             <a:ahLst/>
             <a:cxnLst/>
-            <a:rect r="r" b="b" t="t" l="l"/>
+            <a:rect l="l" t="t" r="r" b="b"/>
             <a:pathLst>
-              <a:path h="1179073" w="1076545">
+              <a:path w="1076545" h="1179073">
                 <a:moveTo>
                   <a:pt x="0" y="0"/>
                 </a:moveTo>
@@ -5575,27 +5821,34 @@
             </a:pathLst>
           </a:custGeom>
           <a:blipFill>
-            <a:blip r:embed="rId3">
+            <a:blip>
               <a:extLst>
                 <a:ext uri="{96DAC541-7B7A-43D3-8B79-37D633B846F1}">
-                  <asvg:svgBlip xmlns:asvg="http://schemas.microsoft.com/office/drawing/2016/SVG/main" r:embed="rId4"/>
+                  <asvg:svgBlip xmlns:asvg="http://schemas.microsoft.com/office/drawing/2016/SVG/main" r:embed="rId3"/>
                 </a:ext>
               </a:extLst>
             </a:blip>
             <a:stretch>
-              <a:fillRect l="0" t="0" r="0" b="0"/>
+              <a:fillRect/>
             </a:stretch>
           </a:blipFill>
         </p:spPr>
+        <p:txBody>
+          <a:bodyPr/>
+          <a:lstStyle/>
+          <a:p>
+            <a:endParaRPr lang="en-GB"/>
+          </a:p>
+        </p:txBody>
       </p:sp>
       <p:grpSp>
         <p:nvGrpSpPr>
-          <p:cNvPr name="Group 13" id="13"/>
+          <p:cNvPr id="13" name="Group 13"/>
           <p:cNvGrpSpPr/>
           <p:nvPr/>
         </p:nvGrpSpPr>
         <p:grpSpPr>
-          <a:xfrm rot="0">
+          <a:xfrm>
             <a:off x="452922" y="971565"/>
             <a:ext cx="6672863" cy="2181759"/>
             <a:chOff x="0" y="0"/>
@@ -5604,12 +5857,12 @@
         </p:grpSpPr>
         <p:sp>
           <p:nvSpPr>
-            <p:cNvPr name="Freeform 14" id="14"/>
+            <p:cNvPr id="14" name="Freeform 14"/>
             <p:cNvSpPr/>
             <p:nvPr/>
           </p:nvSpPr>
           <p:spPr>
-            <a:xfrm flipH="false" flipV="false" rot="0">
+            <a:xfrm>
               <a:off x="0" y="0"/>
               <a:ext cx="5092820" cy="1665148"/>
             </a:xfrm>
@@ -5618,9 +5871,9 @@
               <a:gdLst/>
               <a:ahLst/>
               <a:cxnLst/>
-              <a:rect r="r" b="b" t="t" l="l"/>
+              <a:rect l="l" t="t" r="r" b="b"/>
               <a:pathLst>
-                <a:path h="1665148" w="5092820">
+                <a:path w="5092820" h="1665148">
                   <a:moveTo>
                     <a:pt x="16243" y="0"/>
                   </a:moveTo>
@@ -5684,11 +5937,18 @@
               <a:srgbClr val="FAFAFA"/>
             </a:solidFill>
           </p:spPr>
+          <p:txBody>
+            <a:bodyPr/>
+            <a:lstStyle/>
+            <a:p>
+              <a:endParaRPr lang="en-GB"/>
+            </a:p>
+          </p:txBody>
         </p:sp>
         <p:sp>
           <p:nvSpPr>
-            <p:cNvPr name="TextBox 15" id="15"/>
-            <p:cNvSpPr txBox="true"/>
+            <p:cNvPr id="15" name="TextBox 15"/>
+            <p:cNvSpPr txBox="1"/>
             <p:nvPr/>
           </p:nvSpPr>
           <p:spPr>
@@ -5701,7 +5961,7 @@
             </a:prstGeom>
           </p:spPr>
           <p:txBody>
-            <a:bodyPr anchor="ctr" rtlCol="false" tIns="16732" lIns="16732" bIns="16732" rIns="16732"/>
+            <a:bodyPr lIns="16732" tIns="16732" rIns="16732" bIns="16732" rtlCol="0" anchor="ctr"/>
             <a:lstStyle/>
             <a:p>
               <a:pPr algn="ctr">
@@ -5709,18 +5969,19 @@
                   <a:spcPts val="377"/>
                 </a:lnSpc>
               </a:pPr>
+              <a:endParaRPr/>
             </a:p>
           </p:txBody>
         </p:sp>
       </p:grpSp>
       <p:grpSp>
         <p:nvGrpSpPr>
-          <p:cNvPr name="Group 16" id="16"/>
+          <p:cNvPr id="16" name="Group 16"/>
           <p:cNvGrpSpPr/>
           <p:nvPr/>
         </p:nvGrpSpPr>
         <p:grpSpPr>
-          <a:xfrm rot="0">
+          <a:xfrm>
             <a:off x="452922" y="7119319"/>
             <a:ext cx="6661729" cy="2295447"/>
             <a:chOff x="0" y="0"/>
@@ -5729,12 +5990,12 @@
         </p:grpSpPr>
         <p:sp>
           <p:nvSpPr>
-            <p:cNvPr name="Freeform 17" id="17"/>
+            <p:cNvPr id="17" name="Freeform 17"/>
             <p:cNvSpPr/>
             <p:nvPr/>
           </p:nvSpPr>
           <p:spPr>
-            <a:xfrm flipH="false" flipV="false" rot="0">
+            <a:xfrm>
               <a:off x="0" y="0"/>
               <a:ext cx="5084322" cy="1751917"/>
             </a:xfrm>
@@ -5743,9 +6004,9 @@
               <a:gdLst/>
               <a:ahLst/>
               <a:cxnLst/>
-              <a:rect r="r" b="b" t="t" l="l"/>
+              <a:rect l="l" t="t" r="r" b="b"/>
               <a:pathLst>
-                <a:path h="1751917" w="5084322">
+                <a:path w="5084322" h="1751917">
                   <a:moveTo>
                     <a:pt x="16270" y="0"/>
                   </a:moveTo>
@@ -5789,11 +6050,18 @@
               <a:srgbClr val="FAFAFA"/>
             </a:solidFill>
           </p:spPr>
+          <p:txBody>
+            <a:bodyPr/>
+            <a:lstStyle/>
+            <a:p>
+              <a:endParaRPr lang="en-GB"/>
+            </a:p>
+          </p:txBody>
         </p:sp>
         <p:sp>
           <p:nvSpPr>
-            <p:cNvPr name="TextBox 18" id="18"/>
-            <p:cNvSpPr txBox="true"/>
+            <p:cNvPr id="18" name="TextBox 18"/>
+            <p:cNvSpPr txBox="1"/>
             <p:nvPr/>
           </p:nvSpPr>
           <p:spPr>
@@ -5806,7 +6074,7 @@
             </a:prstGeom>
           </p:spPr>
           <p:txBody>
-            <a:bodyPr anchor="ctr" rtlCol="false" tIns="16732" lIns="16732" bIns="16732" rIns="16732"/>
+            <a:bodyPr lIns="16732" tIns="16732" rIns="16732" bIns="16732" rtlCol="0" anchor="ctr"/>
             <a:lstStyle/>
             <a:p>
               <a:pPr algn="ctr">
@@ -5814,18 +6082,19 @@
                   <a:spcPts val="377"/>
                 </a:lnSpc>
               </a:pPr>
+              <a:endParaRPr/>
             </a:p>
           </p:txBody>
         </p:sp>
       </p:grpSp>
       <p:sp>
         <p:nvSpPr>
-          <p:cNvPr name="Freeform 19" id="19"/>
+          <p:cNvPr id="19" name="Freeform 19"/>
           <p:cNvSpPr/>
           <p:nvPr/>
         </p:nvSpPr>
         <p:spPr>
-          <a:xfrm flipH="false" flipV="false" rot="0">
+          <a:xfrm>
             <a:off x="5908336" y="1980904"/>
             <a:ext cx="1012425" cy="1012425"/>
           </a:xfrm>
@@ -5834,9 +6103,9 @@
             <a:gdLst/>
             <a:ahLst/>
             <a:cxnLst/>
-            <a:rect r="r" b="b" t="t" l="l"/>
+            <a:rect l="l" t="t" r="r" b="b"/>
             <a:pathLst>
-              <a:path h="1012425" w="1012425">
+              <a:path w="1012425" h="1012425">
                 <a:moveTo>
                   <a:pt x="0" y="0"/>
                 </a:moveTo>
@@ -5857,27 +6126,34 @@
             </a:pathLst>
           </a:custGeom>
           <a:blipFill>
-            <a:blip r:embed="rId5">
+            <a:blip>
               <a:extLst>
                 <a:ext uri="{96DAC541-7B7A-43D3-8B79-37D633B846F1}">
-                  <asvg:svgBlip xmlns:asvg="http://schemas.microsoft.com/office/drawing/2016/SVG/main" r:embed="rId6"/>
+                  <asvg:svgBlip xmlns:asvg="http://schemas.microsoft.com/office/drawing/2016/SVG/main" r:embed="rId4"/>
                 </a:ext>
               </a:extLst>
             </a:blip>
             <a:stretch>
-              <a:fillRect l="0" t="0" r="0" b="0"/>
+              <a:fillRect/>
             </a:stretch>
           </a:blipFill>
         </p:spPr>
-      </p:sp>
-      <p:sp>
-        <p:nvSpPr>
-          <p:cNvPr name="Freeform 20" id="20"/>
+        <p:txBody>
+          <a:bodyPr/>
+          <a:lstStyle/>
+          <a:p>
+            <a:endParaRPr lang="en-GB"/>
+          </a:p>
+        </p:txBody>
+      </p:sp>
+      <p:sp>
+        <p:nvSpPr>
+          <p:cNvPr id="20" name="Freeform 20"/>
           <p:cNvSpPr/>
           <p:nvPr/>
         </p:nvSpPr>
         <p:spPr>
-          <a:xfrm flipH="false" flipV="false" rot="0">
+          <a:xfrm>
             <a:off x="4542802" y="10604218"/>
             <a:ext cx="130522" cy="130522"/>
           </a:xfrm>
@@ -5886,9 +6162,9 @@
             <a:gdLst/>
             <a:ahLst/>
             <a:cxnLst/>
-            <a:rect r="r" b="b" t="t" l="l"/>
+            <a:rect l="l" t="t" r="r" b="b"/>
             <a:pathLst>
-              <a:path h="130522" w="130522">
+              <a:path w="130522" h="130522">
                 <a:moveTo>
                   <a:pt x="0" y="0"/>
                 </a:moveTo>
@@ -5909,27 +6185,34 @@
             </a:pathLst>
           </a:custGeom>
           <a:blipFill>
-            <a:blip r:embed="rId7">
+            <a:blip>
               <a:extLst>
                 <a:ext uri="{96DAC541-7B7A-43D3-8B79-37D633B846F1}">
-                  <asvg:svgBlip xmlns:asvg="http://schemas.microsoft.com/office/drawing/2016/SVG/main" r:embed="rId8"/>
+                  <asvg:svgBlip xmlns:asvg="http://schemas.microsoft.com/office/drawing/2016/SVG/main" r:embed="rId5"/>
                 </a:ext>
               </a:extLst>
             </a:blip>
             <a:stretch>
-              <a:fillRect l="0" t="0" r="0" b="0"/>
+              <a:fillRect/>
             </a:stretch>
           </a:blipFill>
         </p:spPr>
-      </p:sp>
-      <p:sp>
-        <p:nvSpPr>
-          <p:cNvPr name="Freeform 21" id="21"/>
+        <p:txBody>
+          <a:bodyPr/>
+          <a:lstStyle/>
+          <a:p>
+            <a:endParaRPr lang="en-GB"/>
+          </a:p>
+        </p:txBody>
+      </p:sp>
+      <p:sp>
+        <p:nvSpPr>
+          <p:cNvPr id="21" name="Freeform 21"/>
           <p:cNvSpPr/>
           <p:nvPr/>
         </p:nvSpPr>
         <p:spPr>
-          <a:xfrm flipH="false" flipV="false" rot="0">
+          <a:xfrm>
             <a:off x="2894336" y="10604218"/>
             <a:ext cx="130522" cy="130522"/>
           </a:xfrm>
@@ -5938,9 +6221,9 @@
             <a:gdLst/>
             <a:ahLst/>
             <a:cxnLst/>
-            <a:rect r="r" b="b" t="t" l="l"/>
+            <a:rect l="l" t="t" r="r" b="b"/>
             <a:pathLst>
-              <a:path h="130522" w="130522">
+              <a:path w="130522" h="130522">
                 <a:moveTo>
                   <a:pt x="0" y="0"/>
                 </a:moveTo>
@@ -5961,27 +6244,34 @@
             </a:pathLst>
           </a:custGeom>
           <a:blipFill>
-            <a:blip r:embed="rId7">
+            <a:blip>
               <a:extLst>
                 <a:ext uri="{96DAC541-7B7A-43D3-8B79-37D633B846F1}">
-                  <asvg:svgBlip xmlns:asvg="http://schemas.microsoft.com/office/drawing/2016/SVG/main" r:embed="rId8"/>
+                  <asvg:svgBlip xmlns:asvg="http://schemas.microsoft.com/office/drawing/2016/SVG/main" r:embed="rId5"/>
                 </a:ext>
               </a:extLst>
             </a:blip>
             <a:stretch>
-              <a:fillRect l="0" t="0" r="0" b="0"/>
+              <a:fillRect/>
             </a:stretch>
           </a:blipFill>
         </p:spPr>
-      </p:sp>
-      <p:sp>
-        <p:nvSpPr>
-          <p:cNvPr name="Freeform 22" id="22"/>
+        <p:txBody>
+          <a:bodyPr/>
+          <a:lstStyle/>
+          <a:p>
+            <a:endParaRPr lang="en-GB"/>
+          </a:p>
+        </p:txBody>
+      </p:sp>
+      <p:sp>
+        <p:nvSpPr>
+          <p:cNvPr id="22" name="Freeform 22"/>
           <p:cNvSpPr/>
           <p:nvPr/>
         </p:nvSpPr>
         <p:spPr>
-          <a:xfrm flipH="false" flipV="false" rot="0">
+          <a:xfrm>
             <a:off x="451176" y="254017"/>
             <a:ext cx="949525" cy="413789"/>
           </a:xfrm>
@@ -5990,9 +6280,9 @@
             <a:gdLst/>
             <a:ahLst/>
             <a:cxnLst/>
-            <a:rect r="r" b="b" t="t" l="l"/>
+            <a:rect l="l" t="t" r="r" b="b"/>
             <a:pathLst>
-              <a:path h="413789" w="949525">
+              <a:path w="949525" h="413789">
                 <a:moveTo>
                   <a:pt x="0" y="0"/>
                 </a:moveTo>
@@ -6013,21 +6303,28 @@
             </a:pathLst>
           </a:custGeom>
           <a:blipFill>
-            <a:blip r:embed="rId9"/>
+            <a:blip r:embed="rId6"/>
             <a:stretch>
-              <a:fillRect l="0" t="0" r="0" b="0"/>
+              <a:fillRect/>
             </a:stretch>
           </a:blipFill>
         </p:spPr>
+        <p:txBody>
+          <a:bodyPr/>
+          <a:lstStyle/>
+          <a:p>
+            <a:endParaRPr lang="en-GB"/>
+          </a:p>
+        </p:txBody>
       </p:sp>
       <p:grpSp>
         <p:nvGrpSpPr>
-          <p:cNvPr name="Group 23" id="23"/>
+          <p:cNvPr id="23" name="Group 23"/>
           <p:cNvGrpSpPr/>
           <p:nvPr/>
         </p:nvGrpSpPr>
         <p:grpSpPr>
-          <a:xfrm rot="0">
+          <a:xfrm>
             <a:off x="447213" y="4298805"/>
             <a:ext cx="6645513" cy="481115"/>
             <a:chOff x="0" y="0"/>
@@ -6036,12 +6333,12 @@
         </p:grpSpPr>
         <p:grpSp>
           <p:nvGrpSpPr>
-            <p:cNvPr name="Group 24" id="24"/>
+            <p:cNvPr id="24" name="Group 24"/>
             <p:cNvGrpSpPr/>
             <p:nvPr/>
           </p:nvGrpSpPr>
           <p:grpSpPr>
-            <a:xfrm rot="0">
+            <a:xfrm>
               <a:off x="0" y="0"/>
               <a:ext cx="746457" cy="641487"/>
               <a:chOff x="0" y="0"/>
@@ -6050,12 +6347,12 @@
           </p:grpSpPr>
           <p:sp>
             <p:nvSpPr>
-              <p:cNvPr name="Freeform 25" id="25"/>
+              <p:cNvPr id="25" name="Freeform 25"/>
               <p:cNvSpPr/>
               <p:nvPr/>
             </p:nvSpPr>
             <p:spPr>
-              <a:xfrm flipH="false" flipV="false" rot="0">
+              <a:xfrm>
                 <a:off x="11191" y="0"/>
                 <a:ext cx="790419" cy="698500"/>
               </a:xfrm>
@@ -6064,9 +6361,9 @@
                 <a:gdLst/>
                 <a:ahLst/>
                 <a:cxnLst/>
-                <a:rect r="r" b="b" t="t" l="l"/>
+                <a:rect l="l" t="t" r="r" b="b"/>
                 <a:pathLst>
-                  <a:path h="698500" w="790419">
+                  <a:path w="790419" h="698500">
                     <a:moveTo>
                       <a:pt x="780746" y="385109"/>
                     </a:moveTo>
@@ -6122,7 +6419,7 @@
                   </a:path>
                 </a:pathLst>
               </a:custGeom>
-              <a:gradFill rotWithShape="true">
+              <a:gradFill rotWithShape="1">
                 <a:gsLst>
                   <a:gs pos="0">
                     <a:srgbClr val="084792">
@@ -6138,11 +6435,18 @@
                 <a:lin ang="0"/>
               </a:gradFill>
             </p:spPr>
+            <p:txBody>
+              <a:bodyPr/>
+              <a:lstStyle/>
+              <a:p>
+                <a:endParaRPr lang="en-GB"/>
+              </a:p>
+            </p:txBody>
           </p:sp>
           <p:sp>
             <p:nvSpPr>
-              <p:cNvPr name="TextBox 26" id="26"/>
-              <p:cNvSpPr txBox="true"/>
+              <p:cNvPr id="26" name="TextBox 26"/>
+              <p:cNvSpPr txBox="1"/>
               <p:nvPr/>
             </p:nvSpPr>
             <p:spPr>
@@ -6155,7 +6459,7 @@
               </a:prstGeom>
             </p:spPr>
             <p:txBody>
-              <a:bodyPr anchor="ctr" rtlCol="false" tIns="189082" lIns="189082" bIns="189082" rIns="189082"/>
+              <a:bodyPr lIns="189082" tIns="189082" rIns="189082" bIns="189082" rtlCol="0" anchor="ctr"/>
               <a:lstStyle/>
               <a:p>
                 <a:pPr algn="ctr">
@@ -6163,18 +6467,19 @@
                     <a:spcPts val="1774"/>
                   </a:lnSpc>
                 </a:pPr>
+                <a:endParaRPr/>
               </a:p>
             </p:txBody>
           </p:sp>
         </p:grpSp>
         <p:sp>
           <p:nvSpPr>
-            <p:cNvPr name="Freeform 27" id="27"/>
+            <p:cNvPr id="27" name="Freeform 27"/>
             <p:cNvSpPr/>
             <p:nvPr/>
           </p:nvSpPr>
           <p:spPr>
-            <a:xfrm flipH="false" flipV="false" rot="0">
+            <a:xfrm>
               <a:off x="163776" y="113807"/>
               <a:ext cx="426079" cy="426079"/>
             </a:xfrm>
@@ -6183,9 +6488,9 @@
               <a:gdLst/>
               <a:ahLst/>
               <a:cxnLst/>
-              <a:rect r="r" b="b" t="t" l="l"/>
+              <a:rect l="l" t="t" r="r" b="b"/>
               <a:pathLst>
-                <a:path h="426079" w="426079">
+                <a:path w="426079" h="426079">
                   <a:moveTo>
                     <a:pt x="0" y="0"/>
                   </a:moveTo>
@@ -6206,36 +6511,43 @@
               </a:pathLst>
             </a:custGeom>
             <a:blipFill>
-              <a:blip r:embed="rId10">
+              <a:blip>
                 <a:extLst>
                   <a:ext uri="{96DAC541-7B7A-43D3-8B79-37D633B846F1}">
-                    <asvg:svgBlip xmlns:asvg="http://schemas.microsoft.com/office/drawing/2016/SVG/main" r:embed="rId11"/>
+                    <asvg:svgBlip xmlns:asvg="http://schemas.microsoft.com/office/drawing/2016/SVG/main" r:embed="rId7"/>
                   </a:ext>
                 </a:extLst>
               </a:blip>
               <a:stretch>
-                <a:fillRect l="0" t="0" r="0" b="0"/>
+                <a:fillRect/>
               </a:stretch>
             </a:blipFill>
           </p:spPr>
+          <p:txBody>
+            <a:bodyPr/>
+            <a:lstStyle/>
+            <a:p>
+              <a:endParaRPr lang="en-GB"/>
+            </a:p>
+          </p:txBody>
         </p:sp>
         <p:sp>
           <p:nvSpPr>
-            <p:cNvPr name="TextBox 28" id="28"/>
-            <p:cNvSpPr txBox="true"/>
+            <p:cNvPr id="28" name="TextBox 28"/>
+            <p:cNvSpPr txBox="1"/>
             <p:nvPr/>
           </p:nvSpPr>
           <p:spPr>
-            <a:xfrm rot="0">
-              <a:off x="965546" y="56837"/>
-              <a:ext cx="7895139" cy="254762"/>
+            <a:xfrm>
+              <a:off x="965545" y="56837"/>
+              <a:ext cx="7895140" cy="244169"/>
             </a:xfrm>
             <a:prstGeom prst="rect">
               <a:avLst/>
             </a:prstGeom>
           </p:spPr>
           <p:txBody>
-            <a:bodyPr anchor="t" rtlCol="false" tIns="0" lIns="0" bIns="0" rIns="0">
+            <a:bodyPr lIns="0" tIns="0" rIns="0" bIns="0" rtlCol="0" anchor="t">
               <a:spAutoFit/>
             </a:bodyPr>
             <a:lstStyle/>
@@ -6246,7 +6558,7 @@
                 </a:lnSpc>
               </a:pPr>
               <a:r>
-                <a:rPr lang="en-US" sz="1200">
+                <a:rPr lang="en-US" sz="1200" dirty="0">
                   <a:solidFill>
                     <a:srgbClr val="000000"/>
                   </a:solidFill>
@@ -6263,12 +6575,12 @@
       </p:grpSp>
       <p:sp>
         <p:nvSpPr>
-          <p:cNvPr name="TextBox 29" id="29"/>
-          <p:cNvSpPr txBox="true"/>
+          <p:cNvPr id="29" name="TextBox 29"/>
+          <p:cNvSpPr txBox="1"/>
           <p:nvPr/>
         </p:nvSpPr>
         <p:spPr>
-          <a:xfrm rot="0">
+          <a:xfrm>
             <a:off x="726230" y="1292006"/>
             <a:ext cx="2307762" cy="210048"/>
           </a:xfrm>
@@ -6277,7 +6589,7 @@
           </a:prstGeom>
         </p:spPr>
         <p:txBody>
-          <a:bodyPr anchor="t" rtlCol="false" tIns="0" lIns="0" bIns="0" rIns="0">
+          <a:bodyPr lIns="0" tIns="0" rIns="0" bIns="0" rtlCol="0" anchor="t">
             <a:spAutoFit/>
           </a:bodyPr>
           <a:lstStyle/>
@@ -6304,12 +6616,12 @@
       </p:sp>
       <p:sp>
         <p:nvSpPr>
-          <p:cNvPr name="TextBox 30" id="30"/>
-          <p:cNvSpPr txBox="true"/>
+          <p:cNvPr id="30" name="TextBox 30"/>
+          <p:cNvSpPr txBox="1"/>
           <p:nvPr/>
         </p:nvSpPr>
         <p:spPr>
-          <a:xfrm rot="0">
+          <a:xfrm>
             <a:off x="734451" y="1552349"/>
             <a:ext cx="6069549" cy="207261"/>
           </a:xfrm>
@@ -6318,7 +6630,7 @@
           </a:prstGeom>
         </p:spPr>
         <p:txBody>
-          <a:bodyPr anchor="t" rtlCol="false" tIns="0" lIns="0" bIns="0" rIns="0">
+          <a:bodyPr lIns="0" tIns="0" rIns="0" bIns="0" rtlCol="0" anchor="t">
             <a:spAutoFit/>
           </a:bodyPr>
           <a:lstStyle/>
@@ -6329,7 +6641,7 @@
               </a:lnSpc>
             </a:pPr>
             <a:r>
-              <a:rPr lang="en-US" sz="1215">
+              <a:rPr lang="en-US" sz="1215" dirty="0">
                 <a:solidFill>
                   <a:srgbClr val="000000"/>
                 </a:solidFill>
@@ -6338,19 +6650,19 @@
                 <a:cs typeface="Aller 2"/>
                 <a:sym typeface="Aller 2"/>
               </a:rPr>
-              <a:t>[KEY_CHALLENGES_PLACEHOLDER_MAXCHAR(475)]</a:t>
-            </a:r>
-          </a:p>
-        </p:txBody>
-      </p:sp>
-      <p:sp>
-        <p:nvSpPr>
-          <p:cNvPr name="TextBox 31" id="31"/>
-          <p:cNvSpPr txBox="true"/>
+              <a:t>KEY_CHALLENGES_PLACEHOLDER_MAXCHAR(475)]</a:t>
+            </a:r>
+          </a:p>
+        </p:txBody>
+      </p:sp>
+      <p:sp>
+        <p:nvSpPr>
+          <p:cNvPr id="31" name="TextBox 31"/>
+          <p:cNvSpPr txBox="1"/>
           <p:nvPr/>
         </p:nvSpPr>
         <p:spPr>
-          <a:xfrm rot="0">
+          <a:xfrm>
             <a:off x="447213" y="3606003"/>
             <a:ext cx="6652584" cy="207261"/>
           </a:xfrm>
@@ -6359,7 +6671,7 @@
           </a:prstGeom>
         </p:spPr>
         <p:txBody>
-          <a:bodyPr anchor="t" rtlCol="false" tIns="0" lIns="0" bIns="0" rIns="0">
+          <a:bodyPr lIns="0" tIns="0" rIns="0" bIns="0" rtlCol="0" anchor="t">
             <a:spAutoFit/>
           </a:bodyPr>
           <a:lstStyle/>
@@ -6370,7 +6682,7 @@
               </a:lnSpc>
             </a:pPr>
             <a:r>
-              <a:rPr lang="en-US" sz="1215">
+              <a:rPr lang="en-US" sz="1215" dirty="0">
                 <a:solidFill>
                   <a:srgbClr val="000000"/>
                 </a:solidFill>
@@ -6386,26 +6698,26 @@
       </p:sp>
       <p:grpSp>
         <p:nvGrpSpPr>
-          <p:cNvPr name="Group 32" id="32"/>
+          <p:cNvPr id="32" name="Group 32"/>
           <p:cNvGrpSpPr/>
           <p:nvPr/>
         </p:nvGrpSpPr>
         <p:grpSpPr>
-          <a:xfrm rot="0">
+          <a:xfrm>
             <a:off x="450390" y="4935495"/>
-            <a:ext cx="6636768" cy="481115"/>
+            <a:ext cx="6636769" cy="481115"/>
             <a:chOff x="0" y="0"/>
-            <a:chExt cx="8849023" cy="641487"/>
+            <a:chExt cx="8849024" cy="641487"/>
           </a:xfrm>
         </p:grpSpPr>
         <p:grpSp>
           <p:nvGrpSpPr>
-            <p:cNvPr name="Group 33" id="33"/>
+            <p:cNvPr id="33" name="Group 33"/>
             <p:cNvGrpSpPr/>
             <p:nvPr/>
           </p:nvGrpSpPr>
           <p:grpSpPr>
-            <a:xfrm rot="0">
+            <a:xfrm>
               <a:off x="0" y="0"/>
               <a:ext cx="746457" cy="641487"/>
               <a:chOff x="0" y="0"/>
@@ -6414,12 +6726,12 @@
           </p:grpSpPr>
           <p:sp>
             <p:nvSpPr>
-              <p:cNvPr name="Freeform 34" id="34"/>
+              <p:cNvPr id="34" name="Freeform 34"/>
               <p:cNvSpPr/>
               <p:nvPr/>
             </p:nvSpPr>
             <p:spPr>
-              <a:xfrm flipH="false" flipV="false" rot="0">
+              <a:xfrm>
                 <a:off x="11191" y="0"/>
                 <a:ext cx="790419" cy="698500"/>
               </a:xfrm>
@@ -6428,9 +6740,9 @@
                 <a:gdLst/>
                 <a:ahLst/>
                 <a:cxnLst/>
-                <a:rect r="r" b="b" t="t" l="l"/>
+                <a:rect l="l" t="t" r="r" b="b"/>
                 <a:pathLst>
-                  <a:path h="698500" w="790419">
+                  <a:path w="790419" h="698500">
                     <a:moveTo>
                       <a:pt x="780746" y="385109"/>
                     </a:moveTo>
@@ -6486,7 +6798,7 @@
                   </a:path>
                 </a:pathLst>
               </a:custGeom>
-              <a:gradFill rotWithShape="true">
+              <a:gradFill rotWithShape="1">
                 <a:gsLst>
                   <a:gs pos="0">
                     <a:srgbClr val="084792">
@@ -6502,11 +6814,18 @@
                 <a:lin ang="0"/>
               </a:gradFill>
             </p:spPr>
+            <p:txBody>
+              <a:bodyPr/>
+              <a:lstStyle/>
+              <a:p>
+                <a:endParaRPr lang="en-GB"/>
+              </a:p>
+            </p:txBody>
           </p:sp>
           <p:sp>
             <p:nvSpPr>
-              <p:cNvPr name="TextBox 35" id="35"/>
-              <p:cNvSpPr txBox="true"/>
+              <p:cNvPr id="35" name="TextBox 35"/>
+              <p:cNvSpPr txBox="1"/>
               <p:nvPr/>
             </p:nvSpPr>
             <p:spPr>
@@ -6519,7 +6838,7 @@
               </a:prstGeom>
             </p:spPr>
             <p:txBody>
-              <a:bodyPr anchor="ctr" rtlCol="false" tIns="189082" lIns="189082" bIns="189082" rIns="189082"/>
+              <a:bodyPr lIns="189082" tIns="189082" rIns="189082" bIns="189082" rtlCol="0" anchor="ctr"/>
               <a:lstStyle/>
               <a:p>
                 <a:pPr algn="ctr">
@@ -6527,18 +6846,19 @@
                     <a:spcPts val="1774"/>
                   </a:lnSpc>
                 </a:pPr>
+                <a:endParaRPr/>
               </a:p>
             </p:txBody>
           </p:sp>
         </p:grpSp>
         <p:sp>
           <p:nvSpPr>
-            <p:cNvPr name="Freeform 36" id="36"/>
+            <p:cNvPr id="36" name="Freeform 36"/>
             <p:cNvSpPr/>
             <p:nvPr/>
           </p:nvSpPr>
           <p:spPr>
-            <a:xfrm flipH="false" flipV="false" rot="0">
+            <a:xfrm>
               <a:off x="127507" y="82394"/>
               <a:ext cx="491443" cy="476699"/>
             </a:xfrm>
@@ -6547,9 +6867,9 @@
               <a:gdLst/>
               <a:ahLst/>
               <a:cxnLst/>
-              <a:rect r="r" b="b" t="t" l="l"/>
+              <a:rect l="l" t="t" r="r" b="b"/>
               <a:pathLst>
-                <a:path h="476699" w="491443">
+                <a:path w="491443" h="476699">
                   <a:moveTo>
                     <a:pt x="0" y="0"/>
                   </a:moveTo>
@@ -6570,36 +6890,43 @@
               </a:pathLst>
             </a:custGeom>
             <a:blipFill>
-              <a:blip r:embed="rId12">
+              <a:blip>
                 <a:extLst>
                   <a:ext uri="{96DAC541-7B7A-43D3-8B79-37D633B846F1}">
-                    <asvg:svgBlip xmlns:asvg="http://schemas.microsoft.com/office/drawing/2016/SVG/main" r:embed="rId13"/>
+                    <asvg:svgBlip xmlns:asvg="http://schemas.microsoft.com/office/drawing/2016/SVG/main" r:embed="rId8"/>
                   </a:ext>
                 </a:extLst>
               </a:blip>
               <a:stretch>
-                <a:fillRect l="0" t="0" r="0" b="0"/>
+                <a:fillRect/>
               </a:stretch>
             </a:blipFill>
           </p:spPr>
+          <p:txBody>
+            <a:bodyPr/>
+            <a:lstStyle/>
+            <a:p>
+              <a:endParaRPr lang="en-GB"/>
+            </a:p>
+          </p:txBody>
         </p:sp>
         <p:sp>
           <p:nvSpPr>
-            <p:cNvPr name="TextBox 37" id="37"/>
-            <p:cNvSpPr txBox="true"/>
+            <p:cNvPr id="37" name="TextBox 37"/>
+            <p:cNvSpPr txBox="1"/>
             <p:nvPr/>
           </p:nvSpPr>
           <p:spPr>
-            <a:xfrm rot="0">
+            <a:xfrm>
               <a:off x="953885" y="73837"/>
-              <a:ext cx="7895139" cy="254762"/>
+              <a:ext cx="7895139" cy="244169"/>
             </a:xfrm>
             <a:prstGeom prst="rect">
               <a:avLst/>
             </a:prstGeom>
           </p:spPr>
           <p:txBody>
-            <a:bodyPr anchor="t" rtlCol="false" tIns="0" lIns="0" bIns="0" rIns="0">
+            <a:bodyPr lIns="0" tIns="0" rIns="0" bIns="0" rtlCol="0" anchor="t">
               <a:spAutoFit/>
             </a:bodyPr>
             <a:lstStyle/>
@@ -6610,7 +6937,7 @@
                 </a:lnSpc>
               </a:pPr>
               <a:r>
-                <a:rPr lang="en-US" sz="1200">
+                <a:rPr lang="en-US" sz="1200" dirty="0">
                   <a:solidFill>
                     <a:srgbClr val="000000"/>
                   </a:solidFill>
@@ -6627,12 +6954,12 @@
       </p:grpSp>
       <p:grpSp>
         <p:nvGrpSpPr>
-          <p:cNvPr name="Group 38" id="38"/>
+          <p:cNvPr id="38" name="Group 38"/>
           <p:cNvGrpSpPr/>
           <p:nvPr/>
         </p:nvGrpSpPr>
         <p:grpSpPr>
-          <a:xfrm rot="0">
+          <a:xfrm>
             <a:off x="447213" y="5610520"/>
             <a:ext cx="6649311" cy="481115"/>
             <a:chOff x="0" y="0"/>
@@ -6641,12 +6968,12 @@
         </p:grpSpPr>
         <p:grpSp>
           <p:nvGrpSpPr>
-            <p:cNvPr name="Group 39" id="39"/>
+            <p:cNvPr id="39" name="Group 39"/>
             <p:cNvGrpSpPr/>
             <p:nvPr/>
           </p:nvGrpSpPr>
           <p:grpSpPr>
-            <a:xfrm rot="0">
+            <a:xfrm>
               <a:off x="0" y="0"/>
               <a:ext cx="746457" cy="641487"/>
               <a:chOff x="0" y="0"/>
@@ -6655,12 +6982,12 @@
           </p:grpSpPr>
           <p:sp>
             <p:nvSpPr>
-              <p:cNvPr name="Freeform 40" id="40"/>
+              <p:cNvPr id="40" name="Freeform 40"/>
               <p:cNvSpPr/>
               <p:nvPr/>
             </p:nvSpPr>
             <p:spPr>
-              <a:xfrm flipH="false" flipV="false" rot="0">
+              <a:xfrm>
                 <a:off x="11191" y="0"/>
                 <a:ext cx="790419" cy="698500"/>
               </a:xfrm>
@@ -6669,9 +6996,9 @@
                 <a:gdLst/>
                 <a:ahLst/>
                 <a:cxnLst/>
-                <a:rect r="r" b="b" t="t" l="l"/>
+                <a:rect l="l" t="t" r="r" b="b"/>
                 <a:pathLst>
-                  <a:path h="698500" w="790419">
+                  <a:path w="790419" h="698500">
                     <a:moveTo>
                       <a:pt x="780746" y="385109"/>
                     </a:moveTo>
@@ -6727,7 +7054,7 @@
                   </a:path>
                 </a:pathLst>
               </a:custGeom>
-              <a:gradFill rotWithShape="true">
+              <a:gradFill rotWithShape="1">
                 <a:gsLst>
                   <a:gs pos="0">
                     <a:srgbClr val="084792">
@@ -6743,11 +7070,18 @@
                 <a:lin ang="0"/>
               </a:gradFill>
             </p:spPr>
+            <p:txBody>
+              <a:bodyPr/>
+              <a:lstStyle/>
+              <a:p>
+                <a:endParaRPr lang="en-GB"/>
+              </a:p>
+            </p:txBody>
           </p:sp>
           <p:sp>
             <p:nvSpPr>
-              <p:cNvPr name="TextBox 41" id="41"/>
-              <p:cNvSpPr txBox="true"/>
+              <p:cNvPr id="41" name="TextBox 41"/>
+              <p:cNvSpPr txBox="1"/>
               <p:nvPr/>
             </p:nvSpPr>
             <p:spPr>
@@ -6760,7 +7094,7 @@
               </a:prstGeom>
             </p:spPr>
             <p:txBody>
-              <a:bodyPr anchor="ctr" rtlCol="false" tIns="189082" lIns="189082" bIns="189082" rIns="189082"/>
+              <a:bodyPr lIns="189082" tIns="189082" rIns="189082" bIns="189082" rtlCol="0" anchor="ctr"/>
               <a:lstStyle/>
               <a:p>
                 <a:pPr algn="ctr">
@@ -6768,18 +7102,19 @@
                     <a:spcPts val="1774"/>
                   </a:lnSpc>
                 </a:pPr>
+                <a:endParaRPr/>
               </a:p>
             </p:txBody>
           </p:sp>
         </p:grpSp>
         <p:sp>
           <p:nvSpPr>
-            <p:cNvPr name="Freeform 42" id="42"/>
+            <p:cNvPr id="42" name="Freeform 42"/>
             <p:cNvSpPr/>
             <p:nvPr/>
           </p:nvSpPr>
           <p:spPr>
-            <a:xfrm flipH="false" flipV="false" rot="0">
+            <a:xfrm>
               <a:off x="199150" y="95250"/>
               <a:ext cx="405324" cy="450987"/>
             </a:xfrm>
@@ -6788,9 +7123,9 @@
               <a:gdLst/>
               <a:ahLst/>
               <a:cxnLst/>
-              <a:rect r="r" b="b" t="t" l="l"/>
+              <a:rect l="l" t="t" r="r" b="b"/>
               <a:pathLst>
-                <a:path h="450987" w="405324">
+                <a:path w="405324" h="450987">
                   <a:moveTo>
                     <a:pt x="0" y="0"/>
                   </a:moveTo>
@@ -6811,36 +7146,43 @@
               </a:pathLst>
             </a:custGeom>
             <a:blipFill>
-              <a:blip r:embed="rId14">
+              <a:blip>
                 <a:extLst>
                   <a:ext uri="{96DAC541-7B7A-43D3-8B79-37D633B846F1}">
-                    <asvg:svgBlip xmlns:asvg="http://schemas.microsoft.com/office/drawing/2016/SVG/main" r:embed="rId15"/>
+                    <asvg:svgBlip xmlns:asvg="http://schemas.microsoft.com/office/drawing/2016/SVG/main" r:embed="rId9"/>
                   </a:ext>
                 </a:extLst>
               </a:blip>
               <a:stretch>
-                <a:fillRect l="0" t="0" r="0" b="0"/>
+                <a:fillRect/>
               </a:stretch>
             </a:blipFill>
           </p:spPr>
+          <p:txBody>
+            <a:bodyPr/>
+            <a:lstStyle/>
+            <a:p>
+              <a:endParaRPr lang="en-GB"/>
+            </a:p>
+          </p:txBody>
         </p:sp>
         <p:sp>
           <p:nvSpPr>
-            <p:cNvPr name="TextBox 43" id="43"/>
-            <p:cNvSpPr txBox="true"/>
+            <p:cNvPr id="43" name="TextBox 43"/>
+            <p:cNvSpPr txBox="1"/>
             <p:nvPr/>
           </p:nvSpPr>
           <p:spPr>
-            <a:xfrm rot="0">
-              <a:off x="965546" y="73837"/>
-              <a:ext cx="7900203" cy="254762"/>
+            <a:xfrm>
+              <a:off x="965545" y="73837"/>
+              <a:ext cx="7900204" cy="244169"/>
             </a:xfrm>
             <a:prstGeom prst="rect">
               <a:avLst/>
             </a:prstGeom>
           </p:spPr>
           <p:txBody>
-            <a:bodyPr anchor="t" rtlCol="false" tIns="0" lIns="0" bIns="0" rIns="0">
+            <a:bodyPr lIns="0" tIns="0" rIns="0" bIns="0" rtlCol="0" anchor="t">
               <a:spAutoFit/>
             </a:bodyPr>
             <a:lstStyle/>
@@ -6851,7 +7193,7 @@
                 </a:lnSpc>
               </a:pPr>
               <a:r>
-                <a:rPr lang="en-US" sz="1200">
+                <a:rPr lang="en-US" sz="1200" dirty="0">
                   <a:solidFill>
                     <a:srgbClr val="000000"/>
                   </a:solidFill>
@@ -6860,19 +7202,7 @@
                   <a:cs typeface="Aller 2"/>
                   <a:sym typeface="Aller 2"/>
                 </a:rPr>
-                <a:t>[RESULTS_DELIVERED_ITEM_3_MAXCHAR(130)</a:t>
-              </a:r>
-              <a:r>
-                <a:rPr lang="en-US" sz="1200">
-                  <a:solidFill>
-                    <a:srgbClr val="000000"/>
-                  </a:solidFill>
-                  <a:latin typeface="Aller 2"/>
-                  <a:ea typeface="Aller 2"/>
-                  <a:cs typeface="Aller 2"/>
-                  <a:sym typeface="Aller 2"/>
-                </a:rPr>
-                <a:t>]</a:t>
+                <a:t>[RESULTS_DELIVERED_ITEM_3_MAXCHAR(130)]</a:t>
               </a:r>
             </a:p>
           </p:txBody>
@@ -6880,26 +7210,26 @@
       </p:grpSp>
       <p:grpSp>
         <p:nvGrpSpPr>
-          <p:cNvPr name="Group 44" id="44"/>
+          <p:cNvPr id="44" name="Group 44"/>
           <p:cNvGrpSpPr/>
           <p:nvPr/>
         </p:nvGrpSpPr>
         <p:grpSpPr>
-          <a:xfrm rot="0">
+          <a:xfrm>
             <a:off x="444822" y="6285545"/>
-            <a:ext cx="6644727" cy="481115"/>
+            <a:ext cx="6644728" cy="481115"/>
             <a:chOff x="0" y="0"/>
-            <a:chExt cx="8859635" cy="641487"/>
+            <a:chExt cx="8859636" cy="641487"/>
           </a:xfrm>
         </p:grpSpPr>
         <p:grpSp>
           <p:nvGrpSpPr>
-            <p:cNvPr name="Group 45" id="45"/>
+            <p:cNvPr id="45" name="Group 45"/>
             <p:cNvGrpSpPr/>
             <p:nvPr/>
           </p:nvGrpSpPr>
           <p:grpSpPr>
-            <a:xfrm rot="0">
+            <a:xfrm>
               <a:off x="0" y="0"/>
               <a:ext cx="746457" cy="641487"/>
               <a:chOff x="0" y="0"/>
@@ -6908,12 +7238,12 @@
           </p:grpSpPr>
           <p:sp>
             <p:nvSpPr>
-              <p:cNvPr name="Freeform 46" id="46"/>
+              <p:cNvPr id="46" name="Freeform 46"/>
               <p:cNvSpPr/>
               <p:nvPr/>
             </p:nvSpPr>
             <p:spPr>
-              <a:xfrm flipH="false" flipV="false" rot="0">
+              <a:xfrm>
                 <a:off x="11191" y="0"/>
                 <a:ext cx="790419" cy="698500"/>
               </a:xfrm>
@@ -6922,9 +7252,9 @@
                 <a:gdLst/>
                 <a:ahLst/>
                 <a:cxnLst/>
-                <a:rect r="r" b="b" t="t" l="l"/>
+                <a:rect l="l" t="t" r="r" b="b"/>
                 <a:pathLst>
-                  <a:path h="698500" w="790419">
+                  <a:path w="790419" h="698500">
                     <a:moveTo>
                       <a:pt x="780746" y="385109"/>
                     </a:moveTo>
@@ -6980,7 +7310,7 @@
                   </a:path>
                 </a:pathLst>
               </a:custGeom>
-              <a:gradFill rotWithShape="true">
+              <a:gradFill rotWithShape="1">
                 <a:gsLst>
                   <a:gs pos="0">
                     <a:srgbClr val="084792">
@@ -6996,11 +7326,18 @@
                 <a:lin ang="0"/>
               </a:gradFill>
             </p:spPr>
+            <p:txBody>
+              <a:bodyPr/>
+              <a:lstStyle/>
+              <a:p>
+                <a:endParaRPr lang="en-GB"/>
+              </a:p>
+            </p:txBody>
           </p:sp>
           <p:sp>
             <p:nvSpPr>
-              <p:cNvPr name="TextBox 47" id="47"/>
-              <p:cNvSpPr txBox="true"/>
+              <p:cNvPr id="47" name="TextBox 47"/>
+              <p:cNvSpPr txBox="1"/>
               <p:nvPr/>
             </p:nvSpPr>
             <p:spPr>
@@ -7013,7 +7350,7 @@
               </a:prstGeom>
             </p:spPr>
             <p:txBody>
-              <a:bodyPr anchor="ctr" rtlCol="false" tIns="189082" lIns="189082" bIns="189082" rIns="189082"/>
+              <a:bodyPr lIns="189082" tIns="189082" rIns="189082" bIns="189082" rtlCol="0" anchor="ctr"/>
               <a:lstStyle/>
               <a:p>
                 <a:pPr algn="ctr">
@@ -7021,18 +7358,19 @@
                     <a:spcPts val="1774"/>
                   </a:lnSpc>
                 </a:pPr>
+                <a:endParaRPr/>
               </a:p>
             </p:txBody>
           </p:sp>
         </p:grpSp>
         <p:sp>
           <p:nvSpPr>
-            <p:cNvPr name="Freeform 48" id="48"/>
+            <p:cNvPr id="48" name="Freeform 48"/>
             <p:cNvSpPr/>
             <p:nvPr/>
           </p:nvSpPr>
           <p:spPr>
-            <a:xfrm flipH="false" flipV="false" rot="0">
+            <a:xfrm>
               <a:off x="162726" y="119421"/>
               <a:ext cx="440652" cy="402646"/>
             </a:xfrm>
@@ -7041,9 +7379,9 @@
               <a:gdLst/>
               <a:ahLst/>
               <a:cxnLst/>
-              <a:rect r="r" b="b" t="t" l="l"/>
+              <a:rect l="l" t="t" r="r" b="b"/>
               <a:pathLst>
-                <a:path h="402646" w="440652">
+                <a:path w="440652" h="402646">
                   <a:moveTo>
                     <a:pt x="0" y="0"/>
                   </a:moveTo>
@@ -7064,36 +7402,43 @@
               </a:pathLst>
             </a:custGeom>
             <a:blipFill>
-              <a:blip r:embed="rId16">
+              <a:blip>
                 <a:extLst>
                   <a:ext uri="{96DAC541-7B7A-43D3-8B79-37D633B846F1}">
-                    <asvg:svgBlip xmlns:asvg="http://schemas.microsoft.com/office/drawing/2016/SVG/main" r:embed="rId17"/>
+                    <asvg:svgBlip xmlns:asvg="http://schemas.microsoft.com/office/drawing/2016/SVG/main" r:embed="rId10"/>
                   </a:ext>
                 </a:extLst>
               </a:blip>
               <a:stretch>
-                <a:fillRect l="0" t="0" r="0" b="0"/>
+                <a:fillRect/>
               </a:stretch>
             </a:blipFill>
           </p:spPr>
+          <p:txBody>
+            <a:bodyPr/>
+            <a:lstStyle/>
+            <a:p>
+              <a:endParaRPr lang="en-GB"/>
+            </a:p>
+          </p:txBody>
         </p:sp>
         <p:sp>
           <p:nvSpPr>
-            <p:cNvPr name="TextBox 49" id="49"/>
-            <p:cNvSpPr txBox="true"/>
+            <p:cNvPr id="49" name="TextBox 49"/>
+            <p:cNvSpPr txBox="1"/>
             <p:nvPr/>
           </p:nvSpPr>
           <p:spPr>
-            <a:xfrm rot="0">
+            <a:xfrm>
               <a:off x="964497" y="73837"/>
-              <a:ext cx="7895139" cy="254762"/>
+              <a:ext cx="7895139" cy="244169"/>
             </a:xfrm>
             <a:prstGeom prst="rect">
               <a:avLst/>
             </a:prstGeom>
           </p:spPr>
           <p:txBody>
-            <a:bodyPr anchor="t" rtlCol="false" tIns="0" lIns="0" bIns="0" rIns="0">
+            <a:bodyPr lIns="0" tIns="0" rIns="0" bIns="0" rtlCol="0" anchor="t">
               <a:spAutoFit/>
             </a:bodyPr>
             <a:lstStyle/>
@@ -7104,7 +7449,7 @@
                 </a:lnSpc>
               </a:pPr>
               <a:r>
-                <a:rPr lang="en-US" sz="1200">
+                <a:rPr lang="en-US" sz="1200" dirty="0">
                   <a:solidFill>
                     <a:srgbClr val="000000"/>
                   </a:solidFill>
@@ -7121,12 +7466,12 @@
       </p:grpSp>
       <p:sp>
         <p:nvSpPr>
-          <p:cNvPr name="TextBox 50" id="50"/>
-          <p:cNvSpPr txBox="true"/>
+          <p:cNvPr id="50" name="TextBox 50"/>
+          <p:cNvSpPr txBox="1"/>
           <p:nvPr/>
         </p:nvSpPr>
         <p:spPr>
-          <a:xfrm rot="0">
+          <a:xfrm>
             <a:off x="447213" y="3372421"/>
             <a:ext cx="3491317" cy="210024"/>
           </a:xfrm>
@@ -7135,12 +7480,12 @@
           </a:prstGeom>
         </p:spPr>
         <p:txBody>
-          <a:bodyPr anchor="t" rtlCol="false" tIns="0" lIns="0" bIns="0" rIns="0">
+          <a:bodyPr lIns="0" tIns="0" rIns="0" bIns="0" rtlCol="0" anchor="t">
             <a:spAutoFit/>
           </a:bodyPr>
           <a:lstStyle/>
           <a:p>
-            <a:pPr algn="l" marL="0" indent="0" lvl="0">
+            <a:pPr marL="0" lvl="0" indent="0" algn="l">
               <a:lnSpc>
                 <a:spcPts val="1597"/>
               </a:lnSpc>
@@ -7161,7 +7506,7 @@
               <a:t>Res</a:t>
             </a:r>
             <a:r>
-              <a:rPr lang="en-US" b="true" sz="1521" strike="noStrike" u="none">
+              <a:rPr lang="en-US" sz="1521" b="1" u="none" strike="noStrike">
                 <a:solidFill>
                   <a:srgbClr val="1F5E9E"/>
                 </a:solidFill>
@@ -7177,12 +7522,12 @@
       </p:sp>
       <p:sp>
         <p:nvSpPr>
-          <p:cNvPr name="TextBox 51" id="51"/>
-          <p:cNvSpPr txBox="true"/>
+          <p:cNvPr id="51" name="TextBox 51"/>
+          <p:cNvSpPr txBox="1"/>
           <p:nvPr/>
         </p:nvSpPr>
         <p:spPr>
-          <a:xfrm rot="0">
+          <a:xfrm>
             <a:off x="707472" y="7340618"/>
             <a:ext cx="3491317" cy="209958"/>
           </a:xfrm>
@@ -7191,12 +7536,12 @@
           </a:prstGeom>
         </p:spPr>
         <p:txBody>
-          <a:bodyPr anchor="t" rtlCol="false" tIns="0" lIns="0" bIns="0" rIns="0">
+          <a:bodyPr lIns="0" tIns="0" rIns="0" bIns="0" rtlCol="0" anchor="t">
             <a:spAutoFit/>
           </a:bodyPr>
           <a:lstStyle/>
           <a:p>
-            <a:pPr algn="l" marL="0" indent="0" lvl="0">
+            <a:pPr marL="0" lvl="0" indent="0" algn="l">
               <a:lnSpc>
                 <a:spcPts val="1597"/>
               </a:lnSpc>
@@ -7221,12 +7566,12 @@
       </p:sp>
       <p:sp>
         <p:nvSpPr>
-          <p:cNvPr name="TextBox 52" id="52"/>
-          <p:cNvSpPr txBox="true"/>
+          <p:cNvPr id="52" name="TextBox 52"/>
+          <p:cNvSpPr txBox="1"/>
           <p:nvPr/>
         </p:nvSpPr>
         <p:spPr>
-          <a:xfrm rot="0">
+          <a:xfrm>
             <a:off x="5240212" y="368012"/>
             <a:ext cx="2202987" cy="219738"/>
           </a:xfrm>
@@ -7235,7 +7580,7 @@
           </a:prstGeom>
         </p:spPr>
         <p:txBody>
-          <a:bodyPr anchor="t" rtlCol="false" tIns="0" lIns="0" bIns="0" rIns="0">
+          <a:bodyPr lIns="0" tIns="0" rIns="0" bIns="0" rtlCol="0" anchor="t">
             <a:spAutoFit/>
           </a:bodyPr>
           <a:lstStyle/>
@@ -7262,12 +7607,12 @@
       </p:sp>
       <p:grpSp>
         <p:nvGrpSpPr>
-          <p:cNvPr name="Group 53" id="53"/>
+          <p:cNvPr id="53" name="Group 53"/>
           <p:cNvGrpSpPr/>
           <p:nvPr/>
         </p:nvGrpSpPr>
         <p:grpSpPr>
-          <a:xfrm rot="0">
+          <a:xfrm>
             <a:off x="463820" y="10313488"/>
             <a:ext cx="2495776" cy="241569"/>
             <a:chOff x="0" y="0"/>
@@ -7276,12 +7621,12 @@
         </p:grpSpPr>
         <p:sp>
           <p:nvSpPr>
-            <p:cNvPr name="Freeform 54" id="54"/>
+            <p:cNvPr id="54" name="Freeform 54"/>
             <p:cNvSpPr/>
             <p:nvPr/>
           </p:nvSpPr>
           <p:spPr>
-            <a:xfrm flipH="false" flipV="false" rot="0">
+            <a:xfrm>
               <a:off x="0" y="0"/>
               <a:ext cx="308606" cy="322092"/>
             </a:xfrm>
@@ -7290,9 +7635,9 @@
               <a:gdLst/>
               <a:ahLst/>
               <a:cxnLst/>
-              <a:rect r="r" b="b" t="t" l="l"/>
+              <a:rect l="l" t="t" r="r" b="b"/>
               <a:pathLst>
-                <a:path h="322092" w="308606">
+                <a:path w="308606" h="322092">
                   <a:moveTo>
                     <a:pt x="0" y="0"/>
                   </a:moveTo>
@@ -7313,21 +7658,28 @@
               </a:pathLst>
             </a:custGeom>
             <a:blipFill>
-              <a:blip r:embed="rId9"/>
+              <a:blip r:embed="rId6"/>
               <a:stretch>
-                <a:fillRect l="0" t="0" r="-139499" b="0"/>
+                <a:fillRect r="-139499"/>
               </a:stretch>
             </a:blipFill>
           </p:spPr>
+          <p:txBody>
+            <a:bodyPr/>
+            <a:lstStyle/>
+            <a:p>
+              <a:endParaRPr lang="en-GB"/>
+            </a:p>
+          </p:txBody>
         </p:sp>
         <p:sp>
           <p:nvSpPr>
-            <p:cNvPr name="TextBox 55" id="55"/>
-            <p:cNvSpPr txBox="true"/>
+            <p:cNvPr id="55" name="TextBox 55"/>
+            <p:cNvSpPr txBox="1"/>
             <p:nvPr/>
           </p:nvSpPr>
           <p:spPr>
-            <a:xfrm rot="0">
+            <a:xfrm>
               <a:off x="390385" y="45518"/>
               <a:ext cx="2937316" cy="213828"/>
             </a:xfrm>
@@ -7336,7 +7688,7 @@
             </a:prstGeom>
           </p:spPr>
           <p:txBody>
-            <a:bodyPr anchor="t" rtlCol="false" tIns="0" lIns="0" bIns="0" rIns="0">
+            <a:bodyPr lIns="0" tIns="0" rIns="0" bIns="0" rtlCol="0" anchor="t">
               <a:spAutoFit/>
             </a:bodyPr>
             <a:lstStyle/>
@@ -7355,7 +7707,7 @@
                   <a:ea typeface="Aller 1"/>
                   <a:cs typeface="Aller 1"/>
                   <a:sym typeface="Aller 1"/>
-                  <a:hlinkClick r:id="rId18" tooltip="https://www.squareoneresources.com"/>
+                  <a:hlinkClick r:id="rId11" tooltip="https://www.squareoneresources.com"/>
                 </a:rPr>
                 <a:t>squareoneresources.com</a:t>
               </a:r>
@@ -7365,26 +7717,26 @@
       </p:grpSp>
       <p:sp>
         <p:nvSpPr>
-          <p:cNvPr name="TextBox 56" id="56"/>
-          <p:cNvSpPr txBox="true"/>
+          <p:cNvPr id="56" name="TextBox 56"/>
+          <p:cNvSpPr txBox="1"/>
           <p:nvPr/>
         </p:nvSpPr>
         <p:spPr>
-          <a:xfrm rot="0">
+          <a:xfrm>
             <a:off x="841169" y="7628038"/>
-            <a:ext cx="6194723" cy="1583543"/>
+            <a:ext cx="6194723" cy="1587807"/>
           </a:xfrm>
           <a:prstGeom prst="rect">
             <a:avLst/>
           </a:prstGeom>
         </p:spPr>
         <p:txBody>
-          <a:bodyPr anchor="t" rtlCol="false" tIns="0" lIns="0" bIns="0" rIns="0">
+          <a:bodyPr lIns="0" tIns="0" rIns="0" bIns="0" rtlCol="0" anchor="t">
             <a:spAutoFit/>
           </a:bodyPr>
           <a:lstStyle/>
           <a:p>
-            <a:pPr algn="l" marL="262343" indent="-131171" lvl="1">
+            <a:pPr marL="262343" lvl="1" indent="-131171" algn="l">
               <a:lnSpc>
                 <a:spcPts val="2114"/>
               </a:lnSpc>
@@ -7392,7 +7744,7 @@
               <a:buChar char="•"/>
             </a:pPr>
             <a:r>
-              <a:rPr lang="en-US" sz="1215">
+              <a:rPr lang="en-US" sz="1215" dirty="0">
                 <a:solidFill>
                   <a:srgbClr val="000000"/>
                 </a:solidFill>
@@ -7405,7 +7757,7 @@
             </a:r>
           </a:p>
           <a:p>
-            <a:pPr algn="l" marL="262343" indent="-131171" lvl="1">
+            <a:pPr marL="262343" lvl="1" indent="-131171" algn="l">
               <a:lnSpc>
                 <a:spcPts val="2114"/>
               </a:lnSpc>
@@ -7413,7 +7765,7 @@
               <a:buChar char="•"/>
             </a:pPr>
             <a:r>
-              <a:rPr lang="en-US" sz="1215">
+              <a:rPr lang="en-US" sz="1215" dirty="0">
                 <a:solidFill>
                   <a:srgbClr val="000000"/>
                 </a:solidFill>
@@ -7426,7 +7778,7 @@
             </a:r>
           </a:p>
           <a:p>
-            <a:pPr algn="l" marL="262343" indent="-131171" lvl="1">
+            <a:pPr marL="262343" lvl="1" indent="-131171" algn="l">
               <a:lnSpc>
                 <a:spcPts val="2114"/>
               </a:lnSpc>
@@ -7434,7 +7786,7 @@
               <a:buChar char="•"/>
             </a:pPr>
             <a:r>
-              <a:rPr lang="en-US" sz="1215">
+              <a:rPr lang="en-US" sz="1215" dirty="0">
                 <a:solidFill>
                   <a:srgbClr val="000000"/>
                 </a:solidFill>
@@ -7447,7 +7799,7 @@
             </a:r>
           </a:p>
           <a:p>
-            <a:pPr algn="l" marL="262343" indent="-131171" lvl="1">
+            <a:pPr marL="262343" lvl="1" indent="-131171" algn="l">
               <a:lnSpc>
                 <a:spcPts val="2114"/>
               </a:lnSpc>
@@ -7455,7 +7807,7 @@
               <a:buChar char="•"/>
             </a:pPr>
             <a:r>
-              <a:rPr lang="en-US" sz="1215">
+              <a:rPr lang="en-US" sz="1215" dirty="0">
                 <a:solidFill>
                   <a:srgbClr val="000000"/>
                 </a:solidFill>
@@ -7468,7 +7820,7 @@
             </a:r>
           </a:p>
           <a:p>
-            <a:pPr algn="l" marL="262343" indent="-131171" lvl="1">
+            <a:pPr marL="262343" lvl="1" indent="-131171" algn="l">
               <a:lnSpc>
                 <a:spcPts val="2114"/>
               </a:lnSpc>
@@ -7476,7 +7828,7 @@
               <a:buChar char="•"/>
             </a:pPr>
             <a:r>
-              <a:rPr lang="en-US" sz="1215">
+              <a:rPr lang="en-US" sz="1215" dirty="0">
                 <a:solidFill>
                   <a:srgbClr val="000000"/>
                 </a:solidFill>
@@ -7489,7 +7841,7 @@
             </a:r>
           </a:p>
           <a:p>
-            <a:pPr algn="l" marL="262343" indent="-131171" lvl="1">
+            <a:pPr marL="262343" lvl="1" indent="-131171" algn="l">
               <a:lnSpc>
                 <a:spcPts val="2114"/>
               </a:lnSpc>
@@ -7497,7 +7849,7 @@
               <a:buChar char="•"/>
             </a:pPr>
             <a:r>
-              <a:rPr lang="en-US" sz="1215">
+              <a:rPr lang="en-US" sz="1215" dirty="0">
                 <a:solidFill>
                   <a:srgbClr val="000000"/>
                 </a:solidFill>

--- a/Case_Study_Template_Standard.pptx
+++ b/Case_Study_Template_Standard.pptx
@@ -147,7 +147,7 @@
   <pc:docChgLst>
     <pc:chgData name="Danny Cater" userId="ba87f93b-7973-45e9-b6f8-e5b4cfef1913" providerId="ADAL" clId="{AC0A7BE5-ACF8-4B8A-8006-46554F178A3B}"/>
     <pc:docChg chg="modSld">
-      <pc:chgData name="Danny Cater" userId="ba87f93b-7973-45e9-b6f8-e5b4cfef1913" providerId="ADAL" clId="{AC0A7BE5-ACF8-4B8A-8006-46554F178A3B}" dt="2026-06-11T14:33:22.483" v="876" actId="20577"/>
+      <pc:chgData name="Danny Cater" userId="ba87f93b-7973-45e9-b6f8-e5b4cfef1913" providerId="ADAL" clId="{AC0A7BE5-ACF8-4B8A-8006-46554F178A3B}" dt="2026-06-11T14:39:11.641" v="877" actId="20577"/>
       <pc:docMkLst>
         <pc:docMk/>
       </pc:docMkLst>
@@ -183,7 +183,7 @@
         </pc:spChg>
       </pc:sldChg>
       <pc:sldChg chg="modSp mod">
-        <pc:chgData name="Danny Cater" userId="ba87f93b-7973-45e9-b6f8-e5b4cfef1913" providerId="ADAL" clId="{AC0A7BE5-ACF8-4B8A-8006-46554F178A3B}" dt="2026-06-11T14:33:22.483" v="876" actId="20577"/>
+        <pc:chgData name="Danny Cater" userId="ba87f93b-7973-45e9-b6f8-e5b4cfef1913" providerId="ADAL" clId="{AC0A7BE5-ACF8-4B8A-8006-46554F178A3B}" dt="2026-06-11T14:39:11.641" v="877" actId="20577"/>
         <pc:sldMkLst>
           <pc:docMk/>
           <pc:sldMk cId="0" sldId="257"/>
@@ -197,7 +197,7 @@
           </ac:spMkLst>
         </pc:spChg>
         <pc:spChg chg="mod">
-          <ac:chgData name="Danny Cater" userId="ba87f93b-7973-45e9-b6f8-e5b4cfef1913" providerId="ADAL" clId="{AC0A7BE5-ACF8-4B8A-8006-46554F178A3B}" dt="2026-06-11T14:30:37.479" v="408" actId="20577"/>
+          <ac:chgData name="Danny Cater" userId="ba87f93b-7973-45e9-b6f8-e5b4cfef1913" providerId="ADAL" clId="{AC0A7BE5-ACF8-4B8A-8006-46554F178A3B}" dt="2026-06-11T14:39:11.641" v="877" actId="20577"/>
           <ac:spMkLst>
             <pc:docMk/>
             <pc:sldMk cId="0" sldId="257"/>
@@ -6641,6 +6641,18 @@
               </a:lnSpc>
             </a:pPr>
             <a:r>
+              <a:rPr lang="en-US" sz="1215">
+                <a:solidFill>
+                  <a:srgbClr val="000000"/>
+                </a:solidFill>
+                <a:latin typeface="Aller 2"/>
+                <a:ea typeface="Aller 2"/>
+                <a:cs typeface="Aller 2"/>
+                <a:sym typeface="Aller 2"/>
+              </a:rPr>
+              <a:t>[KEY</a:t>
+            </a:r>
+            <a:r>
               <a:rPr lang="en-US" sz="1215" dirty="0">
                 <a:solidFill>
                   <a:srgbClr val="000000"/>
@@ -6650,7 +6662,7 @@
                 <a:cs typeface="Aller 2"/>
                 <a:sym typeface="Aller 2"/>
               </a:rPr>
-              <a:t>KEY_CHALLENGES_PLACEHOLDER_MAXCHAR(475)]</a:t>
+              <a:t>_CHALLENGES_PLACEHOLDER_MAXCHAR(475)]</a:t>
             </a:r>
           </a:p>
         </p:txBody>
